--- a/ppt/IoT28-Motors.pptx
+++ b/ppt/IoT28-Motors.pptx
@@ -5,26 +5,27 @@
     <p:sldMasterId id="2147483653" r:id="rId1"/>
   </p:sldMasterIdLst>
   <p:notesMasterIdLst>
-    <p:notesMasterId r:id="rId16"/>
+    <p:notesMasterId r:id="rId17"/>
   </p:notesMasterIdLst>
   <p:handoutMasterIdLst>
-    <p:handoutMasterId r:id="rId17"/>
+    <p:handoutMasterId r:id="rId18"/>
   </p:handoutMasterIdLst>
   <p:sldIdLst>
     <p:sldId id="264" r:id="rId2"/>
     <p:sldId id="265" r:id="rId3"/>
-    <p:sldId id="266" r:id="rId4"/>
-    <p:sldId id="267" r:id="rId5"/>
-    <p:sldId id="268" r:id="rId6"/>
-    <p:sldId id="269" r:id="rId7"/>
-    <p:sldId id="270" r:id="rId8"/>
-    <p:sldId id="271" r:id="rId9"/>
-    <p:sldId id="272" r:id="rId10"/>
-    <p:sldId id="273" r:id="rId11"/>
-    <p:sldId id="274" r:id="rId12"/>
-    <p:sldId id="275" r:id="rId13"/>
-    <p:sldId id="276" r:id="rId14"/>
-    <p:sldId id="277" r:id="rId15"/>
+    <p:sldId id="278" r:id="rId4"/>
+    <p:sldId id="266" r:id="rId5"/>
+    <p:sldId id="267" r:id="rId6"/>
+    <p:sldId id="268" r:id="rId7"/>
+    <p:sldId id="269" r:id="rId8"/>
+    <p:sldId id="270" r:id="rId9"/>
+    <p:sldId id="271" r:id="rId10"/>
+    <p:sldId id="272" r:id="rId11"/>
+    <p:sldId id="273" r:id="rId12"/>
+    <p:sldId id="274" r:id="rId13"/>
+    <p:sldId id="275" r:id="rId14"/>
+    <p:sldId id="276" r:id="rId15"/>
+    <p:sldId id="277" r:id="rId16"/>
   </p:sldIdLst>
   <p:sldSz cx="9144000" cy="6858000" type="screen4x3"/>
   <p:notesSz cx="6648450" cy="9782175"/>
@@ -3762,2113 +3763,6 @@
           <p:cNvPr id="2" name="Titre 1">
             <a:extLst>
               <a:ext uri="{FF2B5EF4-FFF2-40B4-BE49-F238E27FC236}">
-                <a16:creationId xmlns:a16="http://schemas.microsoft.com/office/drawing/2014/main" id="{6A32D2B3-C038-98AB-0C35-108C344B7596}"/>
-              </a:ext>
-            </a:extLst>
-          </p:cNvPr>
-          <p:cNvSpPr>
-            <a:spLocks noGrp="1"/>
-          </p:cNvSpPr>
-          <p:nvPr>
-            <p:ph type="title"/>
-          </p:nvPr>
-        </p:nvSpPr>
-        <p:spPr/>
-        <p:txBody>
-          <a:bodyPr/>
-          <a:lstStyle/>
-          <a:p>
-            <a:r>
-              <a:rPr lang="fr-FR" dirty="0"/>
-              <a:t>28BYJ-48</a:t>
-            </a:r>
-          </a:p>
-        </p:txBody>
-      </p:sp>
-      <p:sp>
-        <p:nvSpPr>
-          <p:cNvPr id="3" name="Espace réservé du contenu 2">
-            <a:extLst>
-              <a:ext uri="{FF2B5EF4-FFF2-40B4-BE49-F238E27FC236}">
-                <a16:creationId xmlns:a16="http://schemas.microsoft.com/office/drawing/2014/main" id="{DB30EC38-F0F8-8475-18A7-628BDE5422D8}"/>
-              </a:ext>
-            </a:extLst>
-          </p:cNvPr>
-          <p:cNvSpPr>
-            <a:spLocks noGrp="1"/>
-          </p:cNvSpPr>
-          <p:nvPr>
-            <p:ph idx="1"/>
-          </p:nvPr>
-        </p:nvSpPr>
-        <p:spPr/>
-        <p:txBody>
-          <a:bodyPr/>
-          <a:lstStyle/>
-          <a:p>
-            <a:r>
-              <a:rPr lang="fr-FR" dirty="0"/>
-              <a:t>Moteur pas à pas de 5v ou 12v</a:t>
-            </a:r>
-          </a:p>
-          <a:p>
-            <a:pPr lvl="1"/>
-            <a:r>
-              <a:rPr lang="fr-FR" dirty="0"/>
-              <a:t>512 pas</a:t>
-            </a:r>
-          </a:p>
-          <a:p>
-            <a:pPr lvl="1"/>
-            <a:r>
-              <a:rPr lang="fr-FR" dirty="0"/>
-              <a:t>0.18°</a:t>
-            </a:r>
-          </a:p>
-          <a:p>
-            <a:pPr lvl="1"/>
-            <a:r>
-              <a:rPr lang="fr-FR" dirty="0"/>
-              <a:t>Nécessite &gt; 200mA</a:t>
-            </a:r>
-          </a:p>
-          <a:p>
-            <a:pPr lvl="1"/>
-            <a:r>
-              <a:rPr lang="fr-FR" dirty="0"/>
-              <a:t>Ne peut pas être piloté seul, nécessite une carte</a:t>
-            </a:r>
-          </a:p>
-          <a:p>
-            <a:pPr lvl="1"/>
-            <a:endParaRPr lang="fr-FR" dirty="0"/>
-          </a:p>
-        </p:txBody>
-      </p:sp>
-      <p:pic>
-        <p:nvPicPr>
-          <p:cNvPr id="6146" name="Picture 2" descr="8BYJ-48 steper motor">
-            <a:extLst>
-              <a:ext uri="{FF2B5EF4-FFF2-40B4-BE49-F238E27FC236}">
-                <a16:creationId xmlns:a16="http://schemas.microsoft.com/office/drawing/2014/main" id="{5D49CA1D-68D9-2487-051F-5F5A2771ED6A}"/>
-              </a:ext>
-            </a:extLst>
-          </p:cNvPr>
-          <p:cNvPicPr>
-            <a:picLocks noChangeAspect="1" noChangeArrowheads="1"/>
-          </p:cNvPicPr>
-          <p:nvPr/>
-        </p:nvPicPr>
-        <p:blipFill>
-          <a:blip r:embed="rId2" cstate="print">
-            <a:extLst>
-              <a:ext uri="{28A0092B-C50C-407E-A947-70E740481C1C}">
-                <a14:useLocalDpi xmlns:a14="http://schemas.microsoft.com/office/drawing/2010/main" val="0"/>
-              </a:ext>
-            </a:extLst>
-          </a:blip>
-          <a:srcRect/>
-          <a:stretch>
-            <a:fillRect/>
-          </a:stretch>
-        </p:blipFill>
-        <p:spPr bwMode="auto">
-          <a:xfrm>
-            <a:off x="5292080" y="4149080"/>
-            <a:ext cx="3923928" cy="2464717"/>
-          </a:xfrm>
-          <a:prstGeom prst="rect">
-            <a:avLst/>
-          </a:prstGeom>
-          <a:noFill/>
-          <a:extLst>
-            <a:ext uri="{909E8E84-426E-40DD-AFC4-6F175D3DCCD1}">
-              <a14:hiddenFill xmlns:a14="http://schemas.microsoft.com/office/drawing/2010/main">
-                <a:solidFill>
-                  <a:srgbClr val="FFFFFF"/>
-                </a:solidFill>
-              </a14:hiddenFill>
-            </a:ext>
-          </a:extLst>
-        </p:spPr>
-      </p:pic>
-    </p:spTree>
-    <p:extLst>
-      <p:ext uri="{BB962C8B-B14F-4D97-AF65-F5344CB8AC3E}">
-        <p14:creationId xmlns:p14="http://schemas.microsoft.com/office/powerpoint/2010/main" val="3207234969"/>
-      </p:ext>
-    </p:extLst>
-  </p:cSld>
-  <p:clrMapOvr>
-    <a:masterClrMapping/>
-  </p:clrMapOvr>
-</p:sld>
-</file>
-
-<file path=ppt/slides/slide11.xml><?xml version="1.0" encoding="utf-8"?>
-<p:sld xmlns:a="http://schemas.openxmlformats.org/drawingml/2006/main" xmlns:r="http://schemas.openxmlformats.org/officeDocument/2006/relationships" xmlns:p="http://schemas.openxmlformats.org/presentationml/2006/main">
-  <p:cSld>
-    <p:spTree>
-      <p:nvGrpSpPr>
-        <p:cNvPr id="1" name=""/>
-        <p:cNvGrpSpPr/>
-        <p:nvPr/>
-      </p:nvGrpSpPr>
-      <p:grpSpPr>
-        <a:xfrm>
-          <a:off x="0" y="0"/>
-          <a:ext cx="0" cy="0"/>
-          <a:chOff x="0" y="0"/>
-          <a:chExt cx="0" cy="0"/>
-        </a:xfrm>
-      </p:grpSpPr>
-      <p:sp>
-        <p:nvSpPr>
-          <p:cNvPr id="2" name="Titre 1">
-            <a:extLst>
-              <a:ext uri="{FF2B5EF4-FFF2-40B4-BE49-F238E27FC236}">
-                <a16:creationId xmlns:a16="http://schemas.microsoft.com/office/drawing/2014/main" id="{C5B8B891-CFFF-FA11-BA2C-F16C0E5C0E90}"/>
-              </a:ext>
-            </a:extLst>
-          </p:cNvPr>
-          <p:cNvSpPr>
-            <a:spLocks noGrp="1"/>
-          </p:cNvSpPr>
-          <p:nvPr>
-            <p:ph type="title"/>
-          </p:nvPr>
-        </p:nvSpPr>
-        <p:spPr/>
-        <p:txBody>
-          <a:bodyPr/>
-          <a:lstStyle/>
-          <a:p>
-            <a:r>
-              <a:rPr lang="fr-FR" dirty="0"/>
-              <a:t>ULN2003</a:t>
-            </a:r>
-          </a:p>
-        </p:txBody>
-      </p:sp>
-      <p:sp>
-        <p:nvSpPr>
-          <p:cNvPr id="3" name="Espace réservé du contenu 2">
-            <a:extLst>
-              <a:ext uri="{FF2B5EF4-FFF2-40B4-BE49-F238E27FC236}">
-                <a16:creationId xmlns:a16="http://schemas.microsoft.com/office/drawing/2014/main" id="{4CC6F048-7988-B1A3-A71F-576E20B9FC91}"/>
-              </a:ext>
-            </a:extLst>
-          </p:cNvPr>
-          <p:cNvSpPr>
-            <a:spLocks noGrp="1"/>
-          </p:cNvSpPr>
-          <p:nvPr>
-            <p:ph idx="1"/>
-          </p:nvPr>
-        </p:nvSpPr>
-        <p:spPr/>
-        <p:txBody>
-          <a:bodyPr/>
-          <a:lstStyle/>
-          <a:p>
-            <a:r>
-              <a:rPr lang="fr-FR" dirty="0"/>
-              <a:t>Driver du 28BYJ-48</a:t>
-            </a:r>
-          </a:p>
-          <a:p>
-            <a:r>
-              <a:rPr lang="fr-FR" dirty="0"/>
-              <a:t>Compatible ESP32 et Arduino</a:t>
-            </a:r>
-          </a:p>
-          <a:p>
-            <a:pPr lvl="1"/>
-            <a:r>
-              <a:rPr lang="fr-FR" dirty="0"/>
-              <a:t>Nécessite du 5v</a:t>
-            </a:r>
-          </a:p>
-          <a:p>
-            <a:pPr lvl="1"/>
-            <a:r>
-              <a:rPr lang="fr-FR" dirty="0"/>
-              <a:t>Doit être alimenté depuis VIN 5v</a:t>
-            </a:r>
-          </a:p>
-        </p:txBody>
-      </p:sp>
-      <p:pic>
-        <p:nvPicPr>
-          <p:cNvPr id="7170" name="Picture 2" descr="ULN2003 Stepper Motor driver board">
-            <a:extLst>
-              <a:ext uri="{FF2B5EF4-FFF2-40B4-BE49-F238E27FC236}">
-                <a16:creationId xmlns:a16="http://schemas.microsoft.com/office/drawing/2014/main" id="{4F4725E4-0CD3-39CF-92B9-6B1282ED0B64}"/>
-              </a:ext>
-            </a:extLst>
-          </p:cNvPr>
-          <p:cNvPicPr>
-            <a:picLocks noChangeAspect="1" noChangeArrowheads="1"/>
-          </p:cNvPicPr>
-          <p:nvPr/>
-        </p:nvPicPr>
-        <p:blipFill>
-          <a:blip r:embed="rId2" cstate="print">
-            <a:extLst>
-              <a:ext uri="{28A0092B-C50C-407E-A947-70E740481C1C}">
-                <a14:useLocalDpi xmlns:a14="http://schemas.microsoft.com/office/drawing/2010/main" val="0"/>
-              </a:ext>
-            </a:extLst>
-          </a:blip>
-          <a:srcRect/>
-          <a:stretch>
-            <a:fillRect/>
-          </a:stretch>
-        </p:blipFill>
-        <p:spPr bwMode="auto">
-          <a:xfrm>
-            <a:off x="4626135" y="3348302"/>
-            <a:ext cx="4493590" cy="3515449"/>
-          </a:xfrm>
-          <a:prstGeom prst="rect">
-            <a:avLst/>
-          </a:prstGeom>
-          <a:noFill/>
-          <a:extLst>
-            <a:ext uri="{909E8E84-426E-40DD-AFC4-6F175D3DCCD1}">
-              <a14:hiddenFill xmlns:a14="http://schemas.microsoft.com/office/drawing/2010/main">
-                <a:solidFill>
-                  <a:srgbClr val="FFFFFF"/>
-                </a:solidFill>
-              </a14:hiddenFill>
-            </a:ext>
-          </a:extLst>
-        </p:spPr>
-      </p:pic>
-    </p:spTree>
-    <p:extLst>
-      <p:ext uri="{BB962C8B-B14F-4D97-AF65-F5344CB8AC3E}">
-        <p14:creationId xmlns:p14="http://schemas.microsoft.com/office/powerpoint/2010/main" val="1535404212"/>
-      </p:ext>
-    </p:extLst>
-  </p:cSld>
-  <p:clrMapOvr>
-    <a:masterClrMapping/>
-  </p:clrMapOvr>
-</p:sld>
-</file>
-
-<file path=ppt/slides/slide12.xml><?xml version="1.0" encoding="utf-8"?>
-<p:sld xmlns:a="http://schemas.openxmlformats.org/drawingml/2006/main" xmlns:r="http://schemas.openxmlformats.org/officeDocument/2006/relationships" xmlns:p="http://schemas.openxmlformats.org/presentationml/2006/main">
-  <p:cSld>
-    <p:spTree>
-      <p:nvGrpSpPr>
-        <p:cNvPr id="1" name=""/>
-        <p:cNvGrpSpPr/>
-        <p:nvPr/>
-      </p:nvGrpSpPr>
-      <p:grpSpPr>
-        <a:xfrm>
-          <a:off x="0" y="0"/>
-          <a:ext cx="0" cy="0"/>
-          <a:chOff x="0" y="0"/>
-          <a:chExt cx="0" cy="0"/>
-        </a:xfrm>
-      </p:grpSpPr>
-      <p:sp>
-        <p:nvSpPr>
-          <p:cNvPr id="2" name="Titre 1">
-            <a:extLst>
-              <a:ext uri="{FF2B5EF4-FFF2-40B4-BE49-F238E27FC236}">
-                <a16:creationId xmlns:a16="http://schemas.microsoft.com/office/drawing/2014/main" id="{0046FC80-E057-14EB-65AA-CBE9C4FC1B58}"/>
-              </a:ext>
-            </a:extLst>
-          </p:cNvPr>
-          <p:cNvSpPr>
-            <a:spLocks noGrp="1"/>
-          </p:cNvSpPr>
-          <p:nvPr>
-            <p:ph type="title"/>
-          </p:nvPr>
-        </p:nvSpPr>
-        <p:spPr/>
-        <p:txBody>
-          <a:bodyPr/>
-          <a:lstStyle/>
-          <a:p>
-            <a:r>
-              <a:rPr lang="fr-FR" dirty="0"/>
-              <a:t>ULN2003 </a:t>
-            </a:r>
-            <a:r>
-              <a:rPr lang="fr-FR" dirty="0" err="1"/>
-              <a:t>Pinout</a:t>
-            </a:r>
-            <a:endParaRPr lang="fr-FR" dirty="0"/>
-          </a:p>
-        </p:txBody>
-      </p:sp>
-      <p:sp>
-        <p:nvSpPr>
-          <p:cNvPr id="3" name="Espace réservé du contenu 2">
-            <a:extLst>
-              <a:ext uri="{FF2B5EF4-FFF2-40B4-BE49-F238E27FC236}">
-                <a16:creationId xmlns:a16="http://schemas.microsoft.com/office/drawing/2014/main" id="{0093BE69-1928-412D-20C9-F35A47B704DD}"/>
-              </a:ext>
-            </a:extLst>
-          </p:cNvPr>
-          <p:cNvSpPr>
-            <a:spLocks noGrp="1"/>
-          </p:cNvSpPr>
-          <p:nvPr>
-            <p:ph idx="1"/>
-          </p:nvPr>
-        </p:nvSpPr>
-        <p:spPr/>
-        <p:txBody>
-          <a:bodyPr/>
-          <a:lstStyle/>
-          <a:p>
-            <a:endParaRPr lang="fr-FR"/>
-          </a:p>
-        </p:txBody>
-      </p:sp>
-      <p:pic>
-        <p:nvPicPr>
-          <p:cNvPr id="5" name="Image 4">
-            <a:extLst>
-              <a:ext uri="{FF2B5EF4-FFF2-40B4-BE49-F238E27FC236}">
-                <a16:creationId xmlns:a16="http://schemas.microsoft.com/office/drawing/2014/main" id="{4367FE66-CA32-1CF1-9358-BAD1A83C44B7}"/>
-              </a:ext>
-            </a:extLst>
-          </p:cNvPr>
-          <p:cNvPicPr>
-            <a:picLocks noChangeAspect="1"/>
-          </p:cNvPicPr>
-          <p:nvPr/>
-        </p:nvPicPr>
-        <p:blipFill>
-          <a:blip r:embed="rId2"/>
-          <a:stretch>
-            <a:fillRect/>
-          </a:stretch>
-        </p:blipFill>
-        <p:spPr>
-          <a:xfrm>
-            <a:off x="-9463" y="1339054"/>
-            <a:ext cx="9144000" cy="5114282"/>
-          </a:xfrm>
-          <a:prstGeom prst="rect">
-            <a:avLst/>
-          </a:prstGeom>
-        </p:spPr>
-      </p:pic>
-    </p:spTree>
-    <p:extLst>
-      <p:ext uri="{BB962C8B-B14F-4D97-AF65-F5344CB8AC3E}">
-        <p14:creationId xmlns:p14="http://schemas.microsoft.com/office/powerpoint/2010/main" val="1087628126"/>
-      </p:ext>
-    </p:extLst>
-  </p:cSld>
-  <p:clrMapOvr>
-    <a:masterClrMapping/>
-  </p:clrMapOvr>
-</p:sld>
-</file>
-
-<file path=ppt/slides/slide13.xml><?xml version="1.0" encoding="utf-8"?>
-<p:sld xmlns:a="http://schemas.openxmlformats.org/drawingml/2006/main" xmlns:r="http://schemas.openxmlformats.org/officeDocument/2006/relationships" xmlns:p="http://schemas.openxmlformats.org/presentationml/2006/main">
-  <p:cSld>
-    <p:spTree>
-      <p:nvGrpSpPr>
-        <p:cNvPr id="1" name=""/>
-        <p:cNvGrpSpPr/>
-        <p:nvPr/>
-      </p:nvGrpSpPr>
-      <p:grpSpPr>
-        <a:xfrm>
-          <a:off x="0" y="0"/>
-          <a:ext cx="0" cy="0"/>
-          <a:chOff x="0" y="0"/>
-          <a:chExt cx="0" cy="0"/>
-        </a:xfrm>
-      </p:grpSpPr>
-      <p:sp>
-        <p:nvSpPr>
-          <p:cNvPr id="2" name="Titre 1">
-            <a:extLst>
-              <a:ext uri="{FF2B5EF4-FFF2-40B4-BE49-F238E27FC236}">
-                <a16:creationId xmlns:a16="http://schemas.microsoft.com/office/drawing/2014/main" id="{0FDAD532-A92D-5275-D95C-F29FC3947ECA}"/>
-              </a:ext>
-            </a:extLst>
-          </p:cNvPr>
-          <p:cNvSpPr>
-            <a:spLocks noGrp="1"/>
-          </p:cNvSpPr>
-          <p:nvPr>
-            <p:ph type="title"/>
-          </p:nvPr>
-        </p:nvSpPr>
-        <p:spPr/>
-        <p:txBody>
-          <a:bodyPr/>
-          <a:lstStyle/>
-          <a:p>
-            <a:r>
-              <a:rPr lang="fr-FR" dirty="0"/>
-              <a:t>ULN2003 Code</a:t>
-            </a:r>
-          </a:p>
-        </p:txBody>
-      </p:sp>
-      <p:sp>
-        <p:nvSpPr>
-          <p:cNvPr id="3" name="Espace réservé du contenu 2">
-            <a:extLst>
-              <a:ext uri="{FF2B5EF4-FFF2-40B4-BE49-F238E27FC236}">
-                <a16:creationId xmlns:a16="http://schemas.microsoft.com/office/drawing/2014/main" id="{2F738C54-E93F-A719-15CC-8E1CD46B33F6}"/>
-              </a:ext>
-            </a:extLst>
-          </p:cNvPr>
-          <p:cNvSpPr>
-            <a:spLocks noGrp="1"/>
-          </p:cNvSpPr>
-          <p:nvPr>
-            <p:ph idx="1"/>
-          </p:nvPr>
-        </p:nvSpPr>
-        <p:spPr/>
-        <p:txBody>
-          <a:bodyPr/>
-          <a:lstStyle/>
-          <a:p>
-            <a:r>
-              <a:rPr lang="en-US" dirty="0"/>
-              <a:t>Un peu difficile à </a:t>
-            </a:r>
-            <a:r>
-              <a:rPr lang="en-US" dirty="0" err="1"/>
-              <a:t>utiliser</a:t>
-            </a:r>
-            <a:endParaRPr lang="en-US" dirty="0"/>
-          </a:p>
-          <a:p>
-            <a:pPr marL="400050" lvl="1" indent="0">
-              <a:buNone/>
-            </a:pPr>
-            <a:r>
-              <a:rPr lang="en-US" sz="2000" dirty="0"/>
-              <a:t>from machine import Pin</a:t>
-            </a:r>
-          </a:p>
-          <a:p>
-            <a:pPr marL="400050" lvl="1" indent="0">
-              <a:buNone/>
-            </a:pPr>
-            <a:r>
-              <a:rPr lang="en-US" sz="2000" dirty="0"/>
-              <a:t>from time import sleep</a:t>
-            </a:r>
-          </a:p>
-          <a:p>
-            <a:pPr marL="400050" lvl="1" indent="0">
-              <a:buNone/>
-            </a:pPr>
-            <a:r>
-              <a:rPr lang="en-US" sz="2000" dirty="0"/>
-              <a:t>IN1 = Pin(26,Pin.OUT)</a:t>
-            </a:r>
-          </a:p>
-          <a:p>
-            <a:pPr marL="400050" lvl="1" indent="0">
-              <a:buNone/>
-            </a:pPr>
-            <a:r>
-              <a:rPr lang="en-US" sz="2000" dirty="0"/>
-              <a:t>IN2 = Pin(25,Pin.OUT)</a:t>
-            </a:r>
-          </a:p>
-          <a:p>
-            <a:pPr marL="400050" lvl="1" indent="0">
-              <a:buNone/>
-            </a:pPr>
-            <a:r>
-              <a:rPr lang="en-US" sz="2000" dirty="0"/>
-              <a:t>IN3 = Pin(33,Pin.OUT)</a:t>
-            </a:r>
-          </a:p>
-          <a:p>
-            <a:pPr marL="400050" lvl="1" indent="0">
-              <a:buNone/>
-            </a:pPr>
-            <a:r>
-              <a:rPr lang="en-US" sz="2000" dirty="0"/>
-              <a:t>IN4 = Pin(32,Pin.OUT)</a:t>
-            </a:r>
-          </a:p>
-          <a:p>
-            <a:pPr marL="400050" lvl="1" indent="0">
-              <a:buNone/>
-            </a:pPr>
-            <a:r>
-              <a:rPr lang="en-US" sz="2000" dirty="0"/>
-              <a:t>pins = [IN1, IN2, IN3, IN4]</a:t>
-            </a:r>
-          </a:p>
-          <a:p>
-            <a:pPr marL="400050" lvl="1" indent="0">
-              <a:buNone/>
-            </a:pPr>
-            <a:r>
-              <a:rPr lang="en-US" sz="2000" dirty="0"/>
-              <a:t>sequence = [[1,0,0,0],[0,1,0,0],[0,0,1,0],[0,0,0,1]]</a:t>
-            </a:r>
-          </a:p>
-          <a:p>
-            <a:pPr marL="400050" lvl="1" indent="0">
-              <a:buNone/>
-            </a:pPr>
-            <a:r>
-              <a:rPr lang="en-US" sz="2000" dirty="0"/>
-              <a:t>while True:</a:t>
-            </a:r>
-          </a:p>
-          <a:p>
-            <a:pPr marL="400050" lvl="1" indent="0">
-              <a:buNone/>
-            </a:pPr>
-            <a:r>
-              <a:rPr lang="en-US" sz="2000" dirty="0"/>
-              <a:t>    for step in sequence:</a:t>
-            </a:r>
-          </a:p>
-          <a:p>
-            <a:pPr marL="400050" lvl="1" indent="0">
-              <a:buNone/>
-            </a:pPr>
-            <a:r>
-              <a:rPr lang="en-US" sz="2000" dirty="0"/>
-              <a:t>        for </a:t>
-            </a:r>
-            <a:r>
-              <a:rPr lang="en-US" sz="2000" dirty="0" err="1"/>
-              <a:t>i</a:t>
-            </a:r>
-            <a:r>
-              <a:rPr lang="en-US" sz="2000" dirty="0"/>
-              <a:t> in range(</a:t>
-            </a:r>
-            <a:r>
-              <a:rPr lang="en-US" sz="2000" dirty="0" err="1"/>
-              <a:t>len</a:t>
-            </a:r>
-            <a:r>
-              <a:rPr lang="en-US" sz="2000" dirty="0"/>
-              <a:t>(pins)):</a:t>
-            </a:r>
-          </a:p>
-          <a:p>
-            <a:pPr marL="400050" lvl="1" indent="0">
-              <a:buNone/>
-            </a:pPr>
-            <a:r>
-              <a:rPr lang="en-US" sz="2000" dirty="0"/>
-              <a:t>            pins[</a:t>
-            </a:r>
-            <a:r>
-              <a:rPr lang="en-US" sz="2000" dirty="0" err="1"/>
-              <a:t>i</a:t>
-            </a:r>
-            <a:r>
-              <a:rPr lang="en-US" sz="2000" dirty="0"/>
-              <a:t>].value(step[</a:t>
-            </a:r>
-            <a:r>
-              <a:rPr lang="en-US" sz="2000" dirty="0" err="1"/>
-              <a:t>i</a:t>
-            </a:r>
-            <a:r>
-              <a:rPr lang="en-US" sz="2000" dirty="0"/>
-              <a:t>])</a:t>
-            </a:r>
-          </a:p>
-          <a:p>
-            <a:pPr marL="400050" lvl="1" indent="0">
-              <a:buNone/>
-            </a:pPr>
-            <a:r>
-              <a:rPr lang="en-US" sz="2000" dirty="0"/>
-              <a:t>            sleep(0.001)</a:t>
-            </a:r>
-            <a:endParaRPr lang="fr-FR" sz="4000" dirty="0"/>
-          </a:p>
-        </p:txBody>
-      </p:sp>
-    </p:spTree>
-    <p:extLst>
-      <p:ext uri="{BB962C8B-B14F-4D97-AF65-F5344CB8AC3E}">
-        <p14:creationId xmlns:p14="http://schemas.microsoft.com/office/powerpoint/2010/main" val="415770773"/>
-      </p:ext>
-    </p:extLst>
-  </p:cSld>
-  <p:clrMapOvr>
-    <a:masterClrMapping/>
-  </p:clrMapOvr>
-</p:sld>
-</file>
-
-<file path=ppt/slides/slide14.xml><?xml version="1.0" encoding="utf-8"?>
-<p:sld xmlns:a="http://schemas.openxmlformats.org/drawingml/2006/main" xmlns:r="http://schemas.openxmlformats.org/officeDocument/2006/relationships" xmlns:p="http://schemas.openxmlformats.org/presentationml/2006/main">
-  <p:cSld>
-    <p:spTree>
-      <p:nvGrpSpPr>
-        <p:cNvPr id="1" name=""/>
-        <p:cNvGrpSpPr/>
-        <p:nvPr/>
-      </p:nvGrpSpPr>
-      <p:grpSpPr>
-        <a:xfrm>
-          <a:off x="0" y="0"/>
-          <a:ext cx="0" cy="0"/>
-          <a:chOff x="0" y="0"/>
-          <a:chExt cx="0" cy="0"/>
-        </a:xfrm>
-      </p:grpSpPr>
-      <p:sp>
-        <p:nvSpPr>
-          <p:cNvPr id="2" name="Titre 1">
-            <a:extLst>
-              <a:ext uri="{FF2B5EF4-FFF2-40B4-BE49-F238E27FC236}">
-                <a16:creationId xmlns:a16="http://schemas.microsoft.com/office/drawing/2014/main" id="{92DC0A81-C27C-E786-5235-F60F3329C18A}"/>
-              </a:ext>
-            </a:extLst>
-          </p:cNvPr>
-          <p:cNvSpPr>
-            <a:spLocks noGrp="1"/>
-          </p:cNvSpPr>
-          <p:nvPr>
-            <p:ph type="title"/>
-          </p:nvPr>
-        </p:nvSpPr>
-        <p:spPr/>
-        <p:txBody>
-          <a:bodyPr/>
-          <a:lstStyle/>
-          <a:p>
-            <a:r>
-              <a:rPr lang="fr-FR" dirty="0"/>
-              <a:t>uln2003.py</a:t>
-            </a:r>
-          </a:p>
-        </p:txBody>
-      </p:sp>
-      <p:sp>
-        <p:nvSpPr>
-          <p:cNvPr id="3" name="Espace réservé du contenu 2">
-            <a:extLst>
-              <a:ext uri="{FF2B5EF4-FFF2-40B4-BE49-F238E27FC236}">
-                <a16:creationId xmlns:a16="http://schemas.microsoft.com/office/drawing/2014/main" id="{678C997F-BA07-B579-2462-68D37D4FF566}"/>
-              </a:ext>
-            </a:extLst>
-          </p:cNvPr>
-          <p:cNvSpPr>
-            <a:spLocks noGrp="1"/>
-          </p:cNvSpPr>
-          <p:nvPr>
-            <p:ph idx="1"/>
-          </p:nvPr>
-        </p:nvSpPr>
-        <p:spPr/>
-        <p:txBody>
-          <a:bodyPr/>
-          <a:lstStyle/>
-          <a:p>
-            <a:r>
-              <a:rPr lang="fr-FR" dirty="0"/>
-              <a:t>Librairie Python pour simplifier le code</a:t>
-            </a:r>
-          </a:p>
-          <a:p>
-            <a:pPr marL="400050" lvl="1" indent="0">
-              <a:buNone/>
-            </a:pPr>
-            <a:r>
-              <a:rPr lang="fr-FR" dirty="0"/>
-              <a:t>s1 = Stepper(HALF_STEP, pin16, pin15, </a:t>
-            </a:r>
-            <a:r>
-              <a:rPr lang="fr-FR"/>
-              <a:t>pin14, pin13</a:t>
-            </a:r>
-            <a:r>
-              <a:rPr lang="fr-FR" dirty="0"/>
-              <a:t>, </a:t>
-            </a:r>
-            <a:r>
-              <a:rPr lang="fr-FR" dirty="0" err="1"/>
-              <a:t>delay</a:t>
-            </a:r>
-            <a:r>
-              <a:rPr lang="fr-FR" dirty="0"/>
-              <a:t>=5)  </a:t>
-            </a:r>
-          </a:p>
-          <a:p>
-            <a:pPr marL="400050" lvl="1" indent="0">
-              <a:buNone/>
-            </a:pPr>
-            <a:r>
-              <a:rPr lang="fr-FR" dirty="0"/>
-              <a:t>s1.step(100)     # </a:t>
-            </a:r>
-            <a:r>
-              <a:rPr lang="fr-FR" dirty="0" err="1"/>
-              <a:t>Rotate</a:t>
-            </a:r>
-            <a:r>
-              <a:rPr lang="fr-FR" dirty="0"/>
-              <a:t> 100 </a:t>
-            </a:r>
-            <a:r>
-              <a:rPr lang="fr-FR" dirty="0" err="1"/>
-              <a:t>steps</a:t>
-            </a:r>
-            <a:r>
-              <a:rPr lang="fr-FR" dirty="0"/>
-              <a:t> </a:t>
-            </a:r>
-            <a:r>
-              <a:rPr lang="fr-FR" dirty="0" err="1"/>
-              <a:t>clockwise</a:t>
-            </a:r>
-            <a:endParaRPr lang="fr-FR" dirty="0"/>
-          </a:p>
-          <a:p>
-            <a:pPr marL="400050" lvl="1" indent="0">
-              <a:buNone/>
-            </a:pPr>
-            <a:r>
-              <a:rPr lang="fr-FR" dirty="0"/>
-              <a:t>s1.step(100, -1) # </a:t>
-            </a:r>
-            <a:r>
-              <a:rPr lang="fr-FR" dirty="0" err="1"/>
-              <a:t>Rotate</a:t>
-            </a:r>
-            <a:r>
-              <a:rPr lang="fr-FR" dirty="0"/>
-              <a:t> 100 </a:t>
-            </a:r>
-            <a:r>
-              <a:rPr lang="fr-FR" dirty="0" err="1"/>
-              <a:t>steps</a:t>
-            </a:r>
-            <a:r>
-              <a:rPr lang="fr-FR" dirty="0"/>
-              <a:t> anti-</a:t>
-            </a:r>
-            <a:r>
-              <a:rPr lang="fr-FR" dirty="0" err="1"/>
-              <a:t>clockwise</a:t>
-            </a:r>
-            <a:endParaRPr lang="fr-FR" dirty="0"/>
-          </a:p>
-          <a:p>
-            <a:pPr marL="400050" lvl="1" indent="0">
-              <a:buNone/>
-            </a:pPr>
-            <a:r>
-              <a:rPr lang="fr-FR" dirty="0"/>
-              <a:t>s1.step(FULL_ROTATION)</a:t>
-            </a:r>
-          </a:p>
-        </p:txBody>
-      </p:sp>
-    </p:spTree>
-    <p:extLst>
-      <p:ext uri="{BB962C8B-B14F-4D97-AF65-F5344CB8AC3E}">
-        <p14:creationId xmlns:p14="http://schemas.microsoft.com/office/powerpoint/2010/main" val="3092848619"/>
-      </p:ext>
-    </p:extLst>
-  </p:cSld>
-  <p:clrMapOvr>
-    <a:masterClrMapping/>
-  </p:clrMapOvr>
-</p:sld>
-</file>
-
-<file path=ppt/slides/slide2.xml><?xml version="1.0" encoding="utf-8"?>
-<p:sld xmlns:a="http://schemas.openxmlformats.org/drawingml/2006/main" xmlns:r="http://schemas.openxmlformats.org/officeDocument/2006/relationships" xmlns:p="http://schemas.openxmlformats.org/presentationml/2006/main">
-  <p:cSld>
-    <p:spTree>
-      <p:nvGrpSpPr>
-        <p:cNvPr id="1" name=""/>
-        <p:cNvGrpSpPr/>
-        <p:nvPr/>
-      </p:nvGrpSpPr>
-      <p:grpSpPr>
-        <a:xfrm>
-          <a:off x="0" y="0"/>
-          <a:ext cx="0" cy="0"/>
-          <a:chOff x="0" y="0"/>
-          <a:chExt cx="0" cy="0"/>
-        </a:xfrm>
-      </p:grpSpPr>
-      <p:sp>
-        <p:nvSpPr>
-          <p:cNvPr id="2" name="Titre 1">
-            <a:extLst>
-              <a:ext uri="{FF2B5EF4-FFF2-40B4-BE49-F238E27FC236}">
-                <a16:creationId xmlns:a16="http://schemas.microsoft.com/office/drawing/2014/main" id="{2DAB3588-E462-5263-490F-858B3BEABC6E}"/>
-              </a:ext>
-            </a:extLst>
-          </p:cNvPr>
-          <p:cNvSpPr>
-            <a:spLocks noGrp="1"/>
-          </p:cNvSpPr>
-          <p:nvPr>
-            <p:ph type="title"/>
-          </p:nvPr>
-        </p:nvSpPr>
-        <p:spPr/>
-        <p:txBody>
-          <a:bodyPr/>
-          <a:lstStyle/>
-          <a:p>
-            <a:r>
-              <a:rPr lang="fr-FR" dirty="0"/>
-              <a:t>Les moteurs</a:t>
-            </a:r>
-          </a:p>
-        </p:txBody>
-      </p:sp>
-      <p:sp>
-        <p:nvSpPr>
-          <p:cNvPr id="3" name="Espace réservé du contenu 2">
-            <a:extLst>
-              <a:ext uri="{FF2B5EF4-FFF2-40B4-BE49-F238E27FC236}">
-                <a16:creationId xmlns:a16="http://schemas.microsoft.com/office/drawing/2014/main" id="{5AAF5B72-D9FD-A22A-9EEA-50000A83530C}"/>
-              </a:ext>
-            </a:extLst>
-          </p:cNvPr>
-          <p:cNvSpPr>
-            <a:spLocks noGrp="1"/>
-          </p:cNvSpPr>
-          <p:nvPr>
-            <p:ph idx="1"/>
-          </p:nvPr>
-        </p:nvSpPr>
-        <p:spPr/>
-        <p:txBody>
-          <a:bodyPr/>
-          <a:lstStyle/>
-          <a:p>
-            <a:r>
-              <a:rPr lang="fr-FR" dirty="0"/>
-              <a:t>Il existe différents types de moteurs électriques</a:t>
-            </a:r>
-          </a:p>
-          <a:p>
-            <a:pPr lvl="1"/>
-            <a:r>
-              <a:rPr lang="fr-FR" dirty="0"/>
-              <a:t>Les servomoteurs</a:t>
-            </a:r>
-          </a:p>
-          <a:p>
-            <a:pPr lvl="1"/>
-            <a:r>
-              <a:rPr lang="fr-FR" dirty="0"/>
-              <a:t>Les moteurs pas à pas</a:t>
-            </a:r>
-          </a:p>
-          <a:p>
-            <a:pPr lvl="1"/>
-            <a:endParaRPr lang="fr-FR" dirty="0"/>
-          </a:p>
-        </p:txBody>
-      </p:sp>
-    </p:spTree>
-    <p:extLst>
-      <p:ext uri="{BB962C8B-B14F-4D97-AF65-F5344CB8AC3E}">
-        <p14:creationId xmlns:p14="http://schemas.microsoft.com/office/powerpoint/2010/main" val="23088078"/>
-      </p:ext>
-    </p:extLst>
-  </p:cSld>
-  <p:clrMapOvr>
-    <a:masterClrMapping/>
-  </p:clrMapOvr>
-</p:sld>
-</file>
-
-<file path=ppt/slides/slide3.xml><?xml version="1.0" encoding="utf-8"?>
-<p:sld xmlns:a="http://schemas.openxmlformats.org/drawingml/2006/main" xmlns:r="http://schemas.openxmlformats.org/officeDocument/2006/relationships" xmlns:p="http://schemas.openxmlformats.org/presentationml/2006/main">
-  <p:cSld>
-    <p:spTree>
-      <p:nvGrpSpPr>
-        <p:cNvPr id="1" name=""/>
-        <p:cNvGrpSpPr/>
-        <p:nvPr/>
-      </p:nvGrpSpPr>
-      <p:grpSpPr>
-        <a:xfrm>
-          <a:off x="0" y="0"/>
-          <a:ext cx="0" cy="0"/>
-          <a:chOff x="0" y="0"/>
-          <a:chExt cx="0" cy="0"/>
-        </a:xfrm>
-      </p:grpSpPr>
-      <p:sp>
-        <p:nvSpPr>
-          <p:cNvPr id="2" name="Titre 1">
-            <a:extLst>
-              <a:ext uri="{FF2B5EF4-FFF2-40B4-BE49-F238E27FC236}">
-                <a16:creationId xmlns:a16="http://schemas.microsoft.com/office/drawing/2014/main" id="{BE2DA72C-3180-D864-8C2F-CD22BE20DA3C}"/>
-              </a:ext>
-            </a:extLst>
-          </p:cNvPr>
-          <p:cNvSpPr>
-            <a:spLocks noGrp="1"/>
-          </p:cNvSpPr>
-          <p:nvPr>
-            <p:ph type="title"/>
-          </p:nvPr>
-        </p:nvSpPr>
-        <p:spPr/>
-        <p:txBody>
-          <a:bodyPr/>
-          <a:lstStyle/>
-          <a:p>
-            <a:r>
-              <a:rPr lang="fr-FR" dirty="0"/>
-              <a:t>Servomoteurs</a:t>
-            </a:r>
-          </a:p>
-        </p:txBody>
-      </p:sp>
-      <p:sp>
-        <p:nvSpPr>
-          <p:cNvPr id="3" name="Espace réservé du contenu 2">
-            <a:extLst>
-              <a:ext uri="{FF2B5EF4-FFF2-40B4-BE49-F238E27FC236}">
-                <a16:creationId xmlns:a16="http://schemas.microsoft.com/office/drawing/2014/main" id="{C118CE0B-F517-53D3-4A6A-A322597DEE80}"/>
-              </a:ext>
-            </a:extLst>
-          </p:cNvPr>
-          <p:cNvSpPr>
-            <a:spLocks noGrp="1"/>
-          </p:cNvSpPr>
-          <p:nvPr>
-            <p:ph idx="1"/>
-          </p:nvPr>
-        </p:nvSpPr>
-        <p:spPr/>
-        <p:txBody>
-          <a:bodyPr/>
-          <a:lstStyle/>
-          <a:p>
-            <a:r>
-              <a:rPr lang="fr-FR" dirty="0"/>
-              <a:t>Un servomoteur est un moteur capable de maintenir une opposition à un effort statique et dont la position est vérifiée en continu et corrigée en fonction de la mesure</a:t>
-            </a:r>
-          </a:p>
-          <a:p>
-            <a:pPr lvl="1"/>
-            <a:r>
-              <a:rPr lang="fr-FR" dirty="0"/>
-              <a:t>C'est donc un système asservi en position</a:t>
-            </a:r>
-          </a:p>
-          <a:p>
-            <a:pPr lvl="1"/>
-            <a:r>
-              <a:rPr lang="fr-FR" dirty="0"/>
-              <a:t>Servomoteur de 180° : gestion précise de l'angle</a:t>
-            </a:r>
-          </a:p>
-          <a:p>
-            <a:pPr lvl="1"/>
-            <a:r>
-              <a:rPr lang="fr-FR" dirty="0"/>
-              <a:t>Utilisé pour les vannes et le modélisme</a:t>
-            </a:r>
-          </a:p>
-          <a:p>
-            <a:pPr lvl="1"/>
-            <a:r>
-              <a:rPr lang="fr-FR" dirty="0"/>
-              <a:t>Servomoteur de 360° : gestion précise de la </a:t>
-            </a:r>
-            <a:r>
-              <a:rPr lang="fr-FR" dirty="0" err="1"/>
-              <a:t>vitrsse</a:t>
-            </a:r>
-            <a:r>
-              <a:rPr lang="fr-FR" dirty="0"/>
-              <a:t> de rotation</a:t>
-            </a:r>
-          </a:p>
-        </p:txBody>
-      </p:sp>
-    </p:spTree>
-    <p:extLst>
-      <p:ext uri="{BB962C8B-B14F-4D97-AF65-F5344CB8AC3E}">
-        <p14:creationId xmlns:p14="http://schemas.microsoft.com/office/powerpoint/2010/main" val="2651195148"/>
-      </p:ext>
-    </p:extLst>
-  </p:cSld>
-  <p:clrMapOvr>
-    <a:masterClrMapping/>
-  </p:clrMapOvr>
-</p:sld>
-</file>
-
-<file path=ppt/slides/slide4.xml><?xml version="1.0" encoding="utf-8"?>
-<p:sld xmlns:a="http://schemas.openxmlformats.org/drawingml/2006/main" xmlns:r="http://schemas.openxmlformats.org/officeDocument/2006/relationships" xmlns:p="http://schemas.openxmlformats.org/presentationml/2006/main">
-  <p:cSld>
-    <p:spTree>
-      <p:nvGrpSpPr>
-        <p:cNvPr id="1" name=""/>
-        <p:cNvGrpSpPr/>
-        <p:nvPr/>
-      </p:nvGrpSpPr>
-      <p:grpSpPr>
-        <a:xfrm>
-          <a:off x="0" y="0"/>
-          <a:ext cx="0" cy="0"/>
-          <a:chOff x="0" y="0"/>
-          <a:chExt cx="0" cy="0"/>
-        </a:xfrm>
-      </p:grpSpPr>
-      <p:sp>
-        <p:nvSpPr>
-          <p:cNvPr id="2" name="Titre 1">
-            <a:extLst>
-              <a:ext uri="{FF2B5EF4-FFF2-40B4-BE49-F238E27FC236}">
-                <a16:creationId xmlns:a16="http://schemas.microsoft.com/office/drawing/2014/main" id="{02C492B7-2074-4CDB-640E-FABE6D44B1B3}"/>
-              </a:ext>
-            </a:extLst>
-          </p:cNvPr>
-          <p:cNvSpPr>
-            <a:spLocks noGrp="1"/>
-          </p:cNvSpPr>
-          <p:nvPr>
-            <p:ph type="title"/>
-          </p:nvPr>
-        </p:nvSpPr>
-        <p:spPr/>
-        <p:txBody>
-          <a:bodyPr/>
-          <a:lstStyle/>
-          <a:p>
-            <a:r>
-              <a:rPr lang="fr-FR" dirty="0"/>
-              <a:t>SG90</a:t>
-            </a:r>
-          </a:p>
-        </p:txBody>
-      </p:sp>
-      <p:sp>
-        <p:nvSpPr>
-          <p:cNvPr id="3" name="Espace réservé du contenu 2">
-            <a:extLst>
-              <a:ext uri="{FF2B5EF4-FFF2-40B4-BE49-F238E27FC236}">
-                <a16:creationId xmlns:a16="http://schemas.microsoft.com/office/drawing/2014/main" id="{6ED4D8E9-C625-E0C1-ED38-10557D5AB72A}"/>
-              </a:ext>
-            </a:extLst>
-          </p:cNvPr>
-          <p:cNvSpPr>
-            <a:spLocks noGrp="1"/>
-          </p:cNvSpPr>
-          <p:nvPr>
-            <p:ph idx="1"/>
-          </p:nvPr>
-        </p:nvSpPr>
-        <p:spPr/>
-        <p:txBody>
-          <a:bodyPr/>
-          <a:lstStyle/>
-          <a:p>
-            <a:r>
-              <a:rPr lang="fr-FR" dirty="0"/>
-              <a:t>Les servomoteurs sont une forme particulière de moteurs qui peuvent être fixés à une position spécifique avec une grande précision</a:t>
-            </a:r>
-          </a:p>
-          <a:p>
-            <a:r>
-              <a:rPr lang="fr-FR" dirty="0"/>
-              <a:t>Cette position est maintenue pour jusqu’à ce qu’une nouvelle instruction soit donnée.</a:t>
-            </a:r>
-          </a:p>
-          <a:p>
-            <a:r>
-              <a:rPr lang="fr-FR" dirty="0"/>
-              <a:t>Les servomoteurs SG90 ont un excellent rapport poids puissance</a:t>
-            </a:r>
-          </a:p>
-          <a:p>
-            <a:pPr lvl="1"/>
-            <a:r>
-              <a:rPr lang="fr-FR" dirty="0"/>
-              <a:t>Couple de 1,5 kg/cm</a:t>
-            </a:r>
-          </a:p>
-          <a:p>
-            <a:pPr lvl="1"/>
-            <a:r>
-              <a:rPr lang="fr-FR" dirty="0"/>
-              <a:t>pour seulement 9g</a:t>
-            </a:r>
-          </a:p>
-        </p:txBody>
-      </p:sp>
-      <p:pic>
-        <p:nvPicPr>
-          <p:cNvPr id="1026" name="Picture 2" descr="Schéma interne servomoteur">
-            <a:extLst>
-              <a:ext uri="{FF2B5EF4-FFF2-40B4-BE49-F238E27FC236}">
-                <a16:creationId xmlns:a16="http://schemas.microsoft.com/office/drawing/2014/main" id="{B36A6D0C-9F40-A3BA-BCA7-B9EC46C0F924}"/>
-              </a:ext>
-            </a:extLst>
-          </p:cNvPr>
-          <p:cNvPicPr>
-            <a:picLocks noChangeAspect="1" noChangeArrowheads="1"/>
-          </p:cNvPicPr>
-          <p:nvPr/>
-        </p:nvPicPr>
-        <p:blipFill>
-          <a:blip r:embed="rId2">
-            <a:extLst>
-              <a:ext uri="{28A0092B-C50C-407E-A947-70E740481C1C}">
-                <a14:useLocalDpi xmlns:a14="http://schemas.microsoft.com/office/drawing/2010/main" val="0"/>
-              </a:ext>
-            </a:extLst>
-          </a:blip>
-          <a:srcRect/>
-          <a:stretch>
-            <a:fillRect/>
-          </a:stretch>
-        </p:blipFill>
-        <p:spPr bwMode="auto">
-          <a:xfrm>
-            <a:off x="5580112" y="4175916"/>
-            <a:ext cx="3556627" cy="2668875"/>
-          </a:xfrm>
-          <a:prstGeom prst="rect">
-            <a:avLst/>
-          </a:prstGeom>
-          <a:noFill/>
-          <a:extLst>
-            <a:ext uri="{909E8E84-426E-40DD-AFC4-6F175D3DCCD1}">
-              <a14:hiddenFill xmlns:a14="http://schemas.microsoft.com/office/drawing/2010/main">
-                <a:solidFill>
-                  <a:srgbClr val="FFFFFF"/>
-                </a:solidFill>
-              </a14:hiddenFill>
-            </a:ext>
-          </a:extLst>
-        </p:spPr>
-      </p:pic>
-    </p:spTree>
-    <p:extLst>
-      <p:ext uri="{BB962C8B-B14F-4D97-AF65-F5344CB8AC3E}">
-        <p14:creationId xmlns:p14="http://schemas.microsoft.com/office/powerpoint/2010/main" val="555187648"/>
-      </p:ext>
-    </p:extLst>
-  </p:cSld>
-  <p:clrMapOvr>
-    <a:masterClrMapping/>
-  </p:clrMapOvr>
-</p:sld>
-</file>
-
-<file path=ppt/slides/slide5.xml><?xml version="1.0" encoding="utf-8"?>
-<p:sld xmlns:a="http://schemas.openxmlformats.org/drawingml/2006/main" xmlns:r="http://schemas.openxmlformats.org/officeDocument/2006/relationships" xmlns:p="http://schemas.openxmlformats.org/presentationml/2006/main">
-  <p:cSld>
-    <p:spTree>
-      <p:nvGrpSpPr>
-        <p:cNvPr id="1" name=""/>
-        <p:cNvGrpSpPr/>
-        <p:nvPr/>
-      </p:nvGrpSpPr>
-      <p:grpSpPr>
-        <a:xfrm>
-          <a:off x="0" y="0"/>
-          <a:ext cx="0" cy="0"/>
-          <a:chOff x="0" y="0"/>
-          <a:chExt cx="0" cy="0"/>
-        </a:xfrm>
-      </p:grpSpPr>
-      <p:sp>
-        <p:nvSpPr>
-          <p:cNvPr id="2" name="Titre 1">
-            <a:extLst>
-              <a:ext uri="{FF2B5EF4-FFF2-40B4-BE49-F238E27FC236}">
-                <a16:creationId xmlns:a16="http://schemas.microsoft.com/office/drawing/2014/main" id="{242D33F0-7BDF-3E61-C049-EBFF2130908B}"/>
-              </a:ext>
-            </a:extLst>
-          </p:cNvPr>
-          <p:cNvSpPr>
-            <a:spLocks noGrp="1"/>
-          </p:cNvSpPr>
-          <p:nvPr>
-            <p:ph type="title"/>
-          </p:nvPr>
-        </p:nvSpPr>
-        <p:spPr/>
-        <p:txBody>
-          <a:bodyPr/>
-          <a:lstStyle/>
-          <a:p>
-            <a:r>
-              <a:rPr lang="fr-FR" dirty="0"/>
-              <a:t>SG90 et PWM</a:t>
-            </a:r>
-          </a:p>
-        </p:txBody>
-      </p:sp>
-      <p:sp>
-        <p:nvSpPr>
-          <p:cNvPr id="3" name="Espace réservé du contenu 2">
-            <a:extLst>
-              <a:ext uri="{FF2B5EF4-FFF2-40B4-BE49-F238E27FC236}">
-                <a16:creationId xmlns:a16="http://schemas.microsoft.com/office/drawing/2014/main" id="{BEBDFD2F-14F9-2D14-A01A-166800E4D0E4}"/>
-              </a:ext>
-            </a:extLst>
-          </p:cNvPr>
-          <p:cNvSpPr>
-            <a:spLocks noGrp="1"/>
-          </p:cNvSpPr>
-          <p:nvPr>
-            <p:ph idx="1"/>
-          </p:nvPr>
-        </p:nvSpPr>
-        <p:spPr/>
-        <p:txBody>
-          <a:bodyPr/>
-          <a:lstStyle/>
-          <a:p>
-            <a:r>
-              <a:rPr lang="fr-FR" dirty="0"/>
-              <a:t>Ce petit servomoteur est commandé en utilisant un signal PWM de 50 Hz de fréquence</a:t>
-            </a:r>
-          </a:p>
-          <a:p>
-            <a:pPr lvl="1"/>
-            <a:r>
-              <a:rPr lang="fr-FR" dirty="0"/>
-              <a:t>soit une impulsion toute les 20ms</a:t>
-            </a:r>
-          </a:p>
-          <a:p>
-            <a:r>
-              <a:rPr lang="fr-FR" dirty="0"/>
-              <a:t>La position du servomoteur est déterminée par la durée des impulsions, généralement variant entre 1ms et 2ms</a:t>
-            </a:r>
-          </a:p>
-        </p:txBody>
-      </p:sp>
-      <p:pic>
-        <p:nvPicPr>
-          <p:cNvPr id="7" name="Image 6">
-            <a:extLst>
-              <a:ext uri="{FF2B5EF4-FFF2-40B4-BE49-F238E27FC236}">
-                <a16:creationId xmlns:a16="http://schemas.microsoft.com/office/drawing/2014/main" id="{E8629ECB-C491-1566-9DAA-22018CED4473}"/>
-              </a:ext>
-            </a:extLst>
-          </p:cNvPr>
-          <p:cNvPicPr>
-            <a:picLocks noChangeAspect="1"/>
-          </p:cNvPicPr>
-          <p:nvPr/>
-        </p:nvPicPr>
-        <p:blipFill>
-          <a:blip r:embed="rId2"/>
-          <a:stretch>
-            <a:fillRect/>
-          </a:stretch>
-        </p:blipFill>
-        <p:spPr>
-          <a:xfrm>
-            <a:off x="2627784" y="3789039"/>
-            <a:ext cx="4392488" cy="3071051"/>
-          </a:xfrm>
-          <a:prstGeom prst="rect">
-            <a:avLst/>
-          </a:prstGeom>
-        </p:spPr>
-      </p:pic>
-    </p:spTree>
-    <p:extLst>
-      <p:ext uri="{BB962C8B-B14F-4D97-AF65-F5344CB8AC3E}">
-        <p14:creationId xmlns:p14="http://schemas.microsoft.com/office/powerpoint/2010/main" val="1948807161"/>
-      </p:ext>
-    </p:extLst>
-  </p:cSld>
-  <p:clrMapOvr>
-    <a:masterClrMapping/>
-  </p:clrMapOvr>
-</p:sld>
-</file>
-
-<file path=ppt/slides/slide6.xml><?xml version="1.0" encoding="utf-8"?>
-<p:sld xmlns:a="http://schemas.openxmlformats.org/drawingml/2006/main" xmlns:r="http://schemas.openxmlformats.org/officeDocument/2006/relationships" xmlns:p="http://schemas.openxmlformats.org/presentationml/2006/main">
-  <p:cSld>
-    <p:spTree>
-      <p:nvGrpSpPr>
-        <p:cNvPr id="1" name=""/>
-        <p:cNvGrpSpPr/>
-        <p:nvPr/>
-      </p:nvGrpSpPr>
-      <p:grpSpPr>
-        <a:xfrm>
-          <a:off x="0" y="0"/>
-          <a:ext cx="0" cy="0"/>
-          <a:chOff x="0" y="0"/>
-          <a:chExt cx="0" cy="0"/>
-        </a:xfrm>
-      </p:grpSpPr>
-      <p:sp>
-        <p:nvSpPr>
-          <p:cNvPr id="2" name="Titre 1">
-            <a:extLst>
-              <a:ext uri="{FF2B5EF4-FFF2-40B4-BE49-F238E27FC236}">
-                <a16:creationId xmlns:a16="http://schemas.microsoft.com/office/drawing/2014/main" id="{60BF10D6-D71B-324A-809F-D9DD6D863A4F}"/>
-              </a:ext>
-            </a:extLst>
-          </p:cNvPr>
-          <p:cNvSpPr>
-            <a:spLocks noGrp="1"/>
-          </p:cNvSpPr>
-          <p:nvPr>
-            <p:ph type="title"/>
-          </p:nvPr>
-        </p:nvSpPr>
-        <p:spPr/>
-        <p:txBody>
-          <a:bodyPr/>
-          <a:lstStyle/>
-          <a:p>
-            <a:r>
-              <a:rPr lang="fr-FR" dirty="0" err="1"/>
-              <a:t>Pinout</a:t>
-            </a:r>
-            <a:endParaRPr lang="fr-FR" dirty="0"/>
-          </a:p>
-        </p:txBody>
-      </p:sp>
-      <p:sp>
-        <p:nvSpPr>
-          <p:cNvPr id="3" name="Espace réservé du contenu 2">
-            <a:extLst>
-              <a:ext uri="{FF2B5EF4-FFF2-40B4-BE49-F238E27FC236}">
-                <a16:creationId xmlns:a16="http://schemas.microsoft.com/office/drawing/2014/main" id="{072161E9-ABFC-D8CC-7063-BF00398B3D9D}"/>
-              </a:ext>
-            </a:extLst>
-          </p:cNvPr>
-          <p:cNvSpPr>
-            <a:spLocks noGrp="1"/>
-          </p:cNvSpPr>
-          <p:nvPr>
-            <p:ph idx="1"/>
-          </p:nvPr>
-        </p:nvSpPr>
-        <p:spPr/>
-        <p:txBody>
-          <a:bodyPr/>
-          <a:lstStyle/>
-          <a:p>
-            <a:endParaRPr lang="fr-FR" dirty="0"/>
-          </a:p>
-        </p:txBody>
-      </p:sp>
-      <p:pic>
-        <p:nvPicPr>
-          <p:cNvPr id="5" name="Image 4">
-            <a:extLst>
-              <a:ext uri="{FF2B5EF4-FFF2-40B4-BE49-F238E27FC236}">
-                <a16:creationId xmlns:a16="http://schemas.microsoft.com/office/drawing/2014/main" id="{011A1D1C-1603-DD32-A800-188B1720BEA5}"/>
-              </a:ext>
-            </a:extLst>
-          </p:cNvPr>
-          <p:cNvPicPr>
-            <a:picLocks noChangeAspect="1"/>
-          </p:cNvPicPr>
-          <p:nvPr/>
-        </p:nvPicPr>
-        <p:blipFill>
-          <a:blip r:embed="rId2"/>
-          <a:stretch>
-            <a:fillRect/>
-          </a:stretch>
-        </p:blipFill>
-        <p:spPr>
-          <a:xfrm>
-            <a:off x="1533101" y="1412776"/>
-            <a:ext cx="6077798" cy="1638529"/>
-          </a:xfrm>
-          <a:prstGeom prst="rect">
-            <a:avLst/>
-          </a:prstGeom>
-        </p:spPr>
-      </p:pic>
-      <p:pic>
-        <p:nvPicPr>
-          <p:cNvPr id="7" name="Image 6">
-            <a:extLst>
-              <a:ext uri="{FF2B5EF4-FFF2-40B4-BE49-F238E27FC236}">
-                <a16:creationId xmlns:a16="http://schemas.microsoft.com/office/drawing/2014/main" id="{B74044F7-F7F6-20E6-7FC6-5F969CF8253E}"/>
-              </a:ext>
-            </a:extLst>
-          </p:cNvPr>
-          <p:cNvPicPr>
-            <a:picLocks noChangeAspect="1"/>
-          </p:cNvPicPr>
-          <p:nvPr/>
-        </p:nvPicPr>
-        <p:blipFill>
-          <a:blip r:embed="rId3"/>
-          <a:stretch>
-            <a:fillRect/>
-          </a:stretch>
-        </p:blipFill>
-        <p:spPr>
-          <a:xfrm>
-            <a:off x="2267744" y="3278528"/>
-            <a:ext cx="4824536" cy="3475016"/>
-          </a:xfrm>
-          <a:prstGeom prst="rect">
-            <a:avLst/>
-          </a:prstGeom>
-        </p:spPr>
-      </p:pic>
-    </p:spTree>
-    <p:extLst>
-      <p:ext uri="{BB962C8B-B14F-4D97-AF65-F5344CB8AC3E}">
-        <p14:creationId xmlns:p14="http://schemas.microsoft.com/office/powerpoint/2010/main" val="816028204"/>
-      </p:ext>
-    </p:extLst>
-  </p:cSld>
-  <p:clrMapOvr>
-    <a:masterClrMapping/>
-  </p:clrMapOvr>
-</p:sld>
-</file>
-
-<file path=ppt/slides/slide7.xml><?xml version="1.0" encoding="utf-8"?>
-<p:sld xmlns:a="http://schemas.openxmlformats.org/drawingml/2006/main" xmlns:r="http://schemas.openxmlformats.org/officeDocument/2006/relationships" xmlns:p="http://schemas.openxmlformats.org/presentationml/2006/main">
-  <p:cSld>
-    <p:spTree>
-      <p:nvGrpSpPr>
-        <p:cNvPr id="1" name=""/>
-        <p:cNvGrpSpPr/>
-        <p:nvPr/>
-      </p:nvGrpSpPr>
-      <p:grpSpPr>
-        <a:xfrm>
-          <a:off x="0" y="0"/>
-          <a:ext cx="0" cy="0"/>
-          <a:chOff x="0" y="0"/>
-          <a:chExt cx="0" cy="0"/>
-        </a:xfrm>
-      </p:grpSpPr>
-      <p:sp>
-        <p:nvSpPr>
-          <p:cNvPr id="2" name="Titre 1">
-            <a:extLst>
-              <a:ext uri="{FF2B5EF4-FFF2-40B4-BE49-F238E27FC236}">
-                <a16:creationId xmlns:a16="http://schemas.microsoft.com/office/drawing/2014/main" id="{0B482C53-E79C-DA26-9EDE-BE893F25437F}"/>
-              </a:ext>
-            </a:extLst>
-          </p:cNvPr>
-          <p:cNvSpPr>
-            <a:spLocks noGrp="1"/>
-          </p:cNvSpPr>
-          <p:nvPr>
-            <p:ph type="title"/>
-          </p:nvPr>
-        </p:nvSpPr>
-        <p:spPr/>
-        <p:txBody>
-          <a:bodyPr/>
-          <a:lstStyle/>
-          <a:p>
-            <a:r>
-              <a:rPr lang="fr-FR" dirty="0"/>
-              <a:t>Développement directement en PWM</a:t>
-            </a:r>
-          </a:p>
-        </p:txBody>
-      </p:sp>
-      <p:sp>
-        <p:nvSpPr>
-          <p:cNvPr id="3" name="Espace réservé du contenu 2">
-            <a:extLst>
-              <a:ext uri="{FF2B5EF4-FFF2-40B4-BE49-F238E27FC236}">
-                <a16:creationId xmlns:a16="http://schemas.microsoft.com/office/drawing/2014/main" id="{EC4BBB16-09D3-EDF9-0A29-EA08D0BA272B}"/>
-              </a:ext>
-            </a:extLst>
-          </p:cNvPr>
-          <p:cNvSpPr>
-            <a:spLocks noGrp="1"/>
-          </p:cNvSpPr>
-          <p:nvPr>
-            <p:ph idx="1"/>
-          </p:nvPr>
-        </p:nvSpPr>
-        <p:spPr/>
-        <p:txBody>
-          <a:bodyPr/>
-          <a:lstStyle/>
-          <a:p>
-            <a:r>
-              <a:rPr lang="fr-FR" sz="2000" dirty="0"/>
-              <a:t>Nécessite pas mal de calcul</a:t>
-            </a:r>
-          </a:p>
-          <a:p>
-            <a:pPr marL="400050" lvl="1" indent="0">
-              <a:buNone/>
-            </a:pPr>
-            <a:r>
-              <a:rPr lang="fr-FR" sz="2000" dirty="0" err="1"/>
-              <a:t>from</a:t>
-            </a:r>
-            <a:r>
-              <a:rPr lang="fr-FR" sz="2000" dirty="0"/>
-              <a:t> machine import </a:t>
-            </a:r>
-            <a:r>
-              <a:rPr lang="fr-FR" sz="2000" dirty="0" err="1"/>
-              <a:t>Pin,PWM</a:t>
-            </a:r>
-            <a:endParaRPr lang="fr-FR" sz="2000" dirty="0"/>
-          </a:p>
-          <a:p>
-            <a:pPr marL="400050" lvl="1" indent="0">
-              <a:buNone/>
-            </a:pPr>
-            <a:r>
-              <a:rPr lang="fr-FR" sz="2000" dirty="0"/>
-              <a:t>import time</a:t>
-            </a:r>
-          </a:p>
-          <a:p>
-            <a:pPr marL="400050" lvl="1" indent="0">
-              <a:buNone/>
-            </a:pPr>
-            <a:r>
-              <a:rPr lang="fr-FR" sz="2000" dirty="0"/>
-              <a:t>sg90 = PWM(Pin(22, mode=</a:t>
-            </a:r>
-            <a:r>
-              <a:rPr lang="fr-FR" sz="2000" dirty="0" err="1"/>
-              <a:t>Pin.OUT</a:t>
-            </a:r>
-            <a:r>
-              <a:rPr lang="fr-FR" sz="2000" dirty="0"/>
-              <a:t>))</a:t>
-            </a:r>
-          </a:p>
-          <a:p>
-            <a:pPr marL="400050" lvl="1" indent="0">
-              <a:buNone/>
-            </a:pPr>
-            <a:r>
-              <a:rPr lang="fr-FR" sz="2000" dirty="0"/>
-              <a:t>sg90.freq(50)</a:t>
-            </a:r>
-          </a:p>
-          <a:p>
-            <a:pPr marL="400050" lvl="1" indent="0">
-              <a:buNone/>
-            </a:pPr>
-            <a:r>
-              <a:rPr lang="fr-FR" sz="2000" dirty="0"/>
-              <a:t># 0.5ms/20ms = 0.025 = 2.5% </a:t>
-            </a:r>
-            <a:r>
-              <a:rPr lang="fr-FR" sz="2000" dirty="0" err="1"/>
-              <a:t>duty</a:t>
-            </a:r>
-            <a:r>
-              <a:rPr lang="fr-FR" sz="2000" dirty="0"/>
-              <a:t> cycle</a:t>
-            </a:r>
-          </a:p>
-          <a:p>
-            <a:pPr marL="400050" lvl="1" indent="0">
-              <a:buNone/>
-            </a:pPr>
-            <a:r>
-              <a:rPr lang="fr-FR" sz="2000" dirty="0"/>
-              <a:t># 2.4ms/20ms = 0.12 = 12% </a:t>
-            </a:r>
-            <a:r>
-              <a:rPr lang="fr-FR" sz="2000" dirty="0" err="1"/>
-              <a:t>duty</a:t>
-            </a:r>
-            <a:r>
-              <a:rPr lang="fr-FR" sz="2000" dirty="0"/>
-              <a:t> cycle</a:t>
-            </a:r>
-          </a:p>
-          <a:p>
-            <a:pPr marL="400050" lvl="1" indent="0">
-              <a:buNone/>
-            </a:pPr>
-            <a:r>
-              <a:rPr lang="fr-FR" sz="2000" dirty="0"/>
-              <a:t># 0.025*1024=25.6</a:t>
-            </a:r>
-          </a:p>
-          <a:p>
-            <a:pPr marL="400050" lvl="1" indent="0">
-              <a:buNone/>
-            </a:pPr>
-            <a:r>
-              <a:rPr lang="fr-FR" sz="2000" dirty="0"/>
-              <a:t># 0.12*1024=122.88</a:t>
-            </a:r>
-          </a:p>
-          <a:p>
-            <a:pPr marL="400050" lvl="1" indent="0">
-              <a:buNone/>
-            </a:pPr>
-            <a:r>
-              <a:rPr lang="fr-FR" sz="2000" dirty="0" err="1"/>
-              <a:t>while</a:t>
-            </a:r>
-            <a:r>
-              <a:rPr lang="fr-FR" sz="2000" dirty="0"/>
-              <a:t> </a:t>
-            </a:r>
-            <a:r>
-              <a:rPr lang="fr-FR" sz="2000" dirty="0" err="1"/>
-              <a:t>True</a:t>
-            </a:r>
-            <a:r>
-              <a:rPr lang="fr-FR" sz="2000" dirty="0"/>
-              <a:t>:</a:t>
-            </a:r>
-          </a:p>
-          <a:p>
-            <a:pPr marL="400050" lvl="1" indent="0">
-              <a:buNone/>
-            </a:pPr>
-            <a:r>
-              <a:rPr lang="fr-FR" sz="2000" dirty="0"/>
-              <a:t>    sg90.duty(26)</a:t>
-            </a:r>
-          </a:p>
-          <a:p>
-            <a:pPr marL="400050" lvl="1" indent="0">
-              <a:buNone/>
-            </a:pPr>
-            <a:r>
-              <a:rPr lang="fr-FR" sz="2000" dirty="0"/>
-              <a:t>    </a:t>
-            </a:r>
-            <a:r>
-              <a:rPr lang="fr-FR" sz="2000" dirty="0" err="1"/>
-              <a:t>time.sleep</a:t>
-            </a:r>
-            <a:r>
-              <a:rPr lang="fr-FR" sz="2000" dirty="0"/>
-              <a:t>(1)</a:t>
-            </a:r>
-          </a:p>
-          <a:p>
-            <a:pPr marL="400050" lvl="1" indent="0">
-              <a:buNone/>
-            </a:pPr>
-            <a:r>
-              <a:rPr lang="fr-FR" sz="2000" dirty="0"/>
-              <a:t>    sg90.duty(123)</a:t>
-            </a:r>
-          </a:p>
-          <a:p>
-            <a:pPr marL="400050" lvl="1" indent="0">
-              <a:buNone/>
-            </a:pPr>
-            <a:r>
-              <a:rPr lang="fr-FR" sz="2000" dirty="0"/>
-              <a:t>    </a:t>
-            </a:r>
-            <a:r>
-              <a:rPr lang="fr-FR" sz="2000" dirty="0" err="1"/>
-              <a:t>time.sleep</a:t>
-            </a:r>
-            <a:r>
-              <a:rPr lang="fr-FR" sz="2000" dirty="0"/>
-              <a:t>(1)</a:t>
-            </a:r>
-          </a:p>
-        </p:txBody>
-      </p:sp>
-      <p:pic>
-        <p:nvPicPr>
-          <p:cNvPr id="9" name="Image 8">
-            <a:extLst>
-              <a:ext uri="{FF2B5EF4-FFF2-40B4-BE49-F238E27FC236}">
-                <a16:creationId xmlns:a16="http://schemas.microsoft.com/office/drawing/2014/main" id="{AB37C272-8BE6-2C8D-CB6D-8183C49E948B}"/>
-              </a:ext>
-            </a:extLst>
-          </p:cNvPr>
-          <p:cNvPicPr>
-            <a:picLocks noChangeAspect="1"/>
-          </p:cNvPicPr>
-          <p:nvPr/>
-        </p:nvPicPr>
-        <p:blipFill>
-          <a:blip r:embed="rId2"/>
-          <a:stretch>
-            <a:fillRect/>
-          </a:stretch>
-        </p:blipFill>
-        <p:spPr>
-          <a:xfrm>
-            <a:off x="6012160" y="3933056"/>
-            <a:ext cx="2863504" cy="2157173"/>
-          </a:xfrm>
-          <a:prstGeom prst="rect">
-            <a:avLst/>
-          </a:prstGeom>
-        </p:spPr>
-      </p:pic>
-    </p:spTree>
-    <p:extLst>
-      <p:ext uri="{BB962C8B-B14F-4D97-AF65-F5344CB8AC3E}">
-        <p14:creationId xmlns:p14="http://schemas.microsoft.com/office/powerpoint/2010/main" val="1333093089"/>
-      </p:ext>
-    </p:extLst>
-  </p:cSld>
-  <p:clrMapOvr>
-    <a:masterClrMapping/>
-  </p:clrMapOvr>
-</p:sld>
-</file>
-
-<file path=ppt/slides/slide8.xml><?xml version="1.0" encoding="utf-8"?>
-<p:sld xmlns:a="http://schemas.openxmlformats.org/drawingml/2006/main" xmlns:r="http://schemas.openxmlformats.org/officeDocument/2006/relationships" xmlns:p="http://schemas.openxmlformats.org/presentationml/2006/main">
-  <p:cSld>
-    <p:spTree>
-      <p:nvGrpSpPr>
-        <p:cNvPr id="1" name=""/>
-        <p:cNvGrpSpPr/>
-        <p:nvPr/>
-      </p:nvGrpSpPr>
-      <p:grpSpPr>
-        <a:xfrm>
-          <a:off x="0" y="0"/>
-          <a:ext cx="0" cy="0"/>
-          <a:chOff x="0" y="0"/>
-          <a:chExt cx="0" cy="0"/>
-        </a:xfrm>
-      </p:grpSpPr>
-      <p:sp>
-        <p:nvSpPr>
-          <p:cNvPr id="2" name="Titre 1">
-            <a:extLst>
-              <a:ext uri="{FF2B5EF4-FFF2-40B4-BE49-F238E27FC236}">
-                <a16:creationId xmlns:a16="http://schemas.microsoft.com/office/drawing/2014/main" id="{27DF4CF1-DE33-C322-7F1B-C7808FAE75C7}"/>
-              </a:ext>
-            </a:extLst>
-          </p:cNvPr>
-          <p:cNvSpPr>
-            <a:spLocks noGrp="1"/>
-          </p:cNvSpPr>
-          <p:nvPr>
-            <p:ph type="title"/>
-          </p:nvPr>
-        </p:nvSpPr>
-        <p:spPr/>
-        <p:txBody>
-          <a:bodyPr/>
-          <a:lstStyle/>
-          <a:p>
-            <a:r>
-              <a:rPr lang="fr-FR" dirty="0"/>
-              <a:t>Servo.py</a:t>
-            </a:r>
-          </a:p>
-        </p:txBody>
-      </p:sp>
-      <p:sp>
-        <p:nvSpPr>
-          <p:cNvPr id="3" name="Espace réservé du contenu 2">
-            <a:extLst>
-              <a:ext uri="{FF2B5EF4-FFF2-40B4-BE49-F238E27FC236}">
-                <a16:creationId xmlns:a16="http://schemas.microsoft.com/office/drawing/2014/main" id="{68AEBF5A-BDA4-667A-284E-12C9EF772D6A}"/>
-              </a:ext>
-            </a:extLst>
-          </p:cNvPr>
-          <p:cNvSpPr>
-            <a:spLocks noGrp="1"/>
-          </p:cNvSpPr>
-          <p:nvPr>
-            <p:ph idx="1"/>
-          </p:nvPr>
-        </p:nvSpPr>
-        <p:spPr/>
-        <p:txBody>
-          <a:bodyPr/>
-          <a:lstStyle/>
-          <a:p>
-            <a:r>
-              <a:rPr lang="fr-FR" sz="1800" dirty="0"/>
-              <a:t>La librairie Servo.py permet de simplifier le code</a:t>
-            </a:r>
-          </a:p>
-          <a:p>
-            <a:pPr marL="457200" lvl="1" indent="0">
-              <a:buNone/>
-            </a:pPr>
-            <a:r>
-              <a:rPr lang="fr-FR" sz="2000" dirty="0" err="1"/>
-              <a:t>from</a:t>
-            </a:r>
-            <a:r>
-              <a:rPr lang="fr-FR" sz="2000" dirty="0"/>
-              <a:t> servo import Servo</a:t>
-            </a:r>
-          </a:p>
-          <a:p>
-            <a:pPr marL="457200" lvl="1" indent="0">
-              <a:buNone/>
-            </a:pPr>
-            <a:r>
-              <a:rPr lang="fr-FR" sz="2000" dirty="0"/>
-              <a:t>import time</a:t>
-            </a:r>
-          </a:p>
-          <a:p>
-            <a:pPr marL="457200" lvl="1" indent="0">
-              <a:buNone/>
-            </a:pPr>
-            <a:r>
-              <a:rPr lang="fr-FR" sz="2000" dirty="0" err="1"/>
-              <a:t>motor</a:t>
-            </a:r>
-            <a:r>
-              <a:rPr lang="fr-FR" sz="2000" dirty="0"/>
-              <a:t>=Servo(pin=22) # A changer selon la broche utilisée</a:t>
-            </a:r>
-          </a:p>
-          <a:p>
-            <a:pPr marL="457200" lvl="1" indent="0">
-              <a:buNone/>
-            </a:pPr>
-            <a:r>
-              <a:rPr lang="fr-FR" sz="2000" dirty="0" err="1"/>
-              <a:t>motor.move</a:t>
-            </a:r>
-            <a:r>
-              <a:rPr lang="fr-FR" sz="2000" dirty="0"/>
-              <a:t>(0) # tourne le servo à 0°</a:t>
-            </a:r>
-          </a:p>
-          <a:p>
-            <a:pPr marL="457200" lvl="1" indent="0">
-              <a:buNone/>
-            </a:pPr>
-            <a:r>
-              <a:rPr lang="fr-FR" sz="2000" dirty="0" err="1"/>
-              <a:t>time.sleep</a:t>
-            </a:r>
-            <a:r>
-              <a:rPr lang="fr-FR" sz="2000" dirty="0"/>
-              <a:t>(0.3)</a:t>
-            </a:r>
-          </a:p>
-          <a:p>
-            <a:pPr marL="457200" lvl="1" indent="0">
-              <a:buNone/>
-            </a:pPr>
-            <a:r>
-              <a:rPr lang="fr-FR" sz="2000" dirty="0" err="1"/>
-              <a:t>motor.move</a:t>
-            </a:r>
-            <a:r>
-              <a:rPr lang="fr-FR" sz="2000" dirty="0"/>
-              <a:t>(90) # tourne le servo à 90°</a:t>
-            </a:r>
-          </a:p>
-          <a:p>
-            <a:pPr marL="457200" lvl="1" indent="0">
-              <a:buNone/>
-            </a:pPr>
-            <a:r>
-              <a:rPr lang="fr-FR" sz="2000" dirty="0" err="1"/>
-              <a:t>time.sleep</a:t>
-            </a:r>
-            <a:r>
-              <a:rPr lang="fr-FR" sz="2000" dirty="0"/>
-              <a:t>(0.3)</a:t>
-            </a:r>
-          </a:p>
-          <a:p>
-            <a:pPr marL="457200" lvl="1" indent="0">
-              <a:buNone/>
-            </a:pPr>
-            <a:r>
-              <a:rPr lang="fr-FR" sz="2000" dirty="0" err="1"/>
-              <a:t>motor.move</a:t>
-            </a:r>
-            <a:r>
-              <a:rPr lang="fr-FR" sz="2000" dirty="0"/>
-              <a:t>(180) # tourne le servo à 180°</a:t>
-            </a:r>
-          </a:p>
-          <a:p>
-            <a:pPr marL="457200" lvl="1" indent="0">
-              <a:buNone/>
-            </a:pPr>
-            <a:r>
-              <a:rPr lang="fr-FR" sz="2000" dirty="0" err="1"/>
-              <a:t>time.sleep</a:t>
-            </a:r>
-            <a:r>
-              <a:rPr lang="fr-FR" sz="2000" dirty="0"/>
-              <a:t>(0.3)</a:t>
-            </a:r>
-          </a:p>
-          <a:p>
-            <a:pPr marL="457200" lvl="1" indent="0">
-              <a:buNone/>
-            </a:pPr>
-            <a:r>
-              <a:rPr lang="fr-FR" sz="2000" dirty="0" err="1"/>
-              <a:t>motor.move</a:t>
-            </a:r>
-            <a:r>
-              <a:rPr lang="fr-FR" sz="2000" dirty="0"/>
-              <a:t>(90) # tourne le servo à 90°</a:t>
-            </a:r>
-          </a:p>
-          <a:p>
-            <a:pPr marL="457200" lvl="1" indent="0">
-              <a:buNone/>
-            </a:pPr>
-            <a:r>
-              <a:rPr lang="fr-FR" sz="2000" dirty="0" err="1"/>
-              <a:t>time.sleep</a:t>
-            </a:r>
-            <a:r>
-              <a:rPr lang="fr-FR" sz="2000" dirty="0"/>
-              <a:t>(0.3)</a:t>
-            </a:r>
-          </a:p>
-          <a:p>
-            <a:pPr marL="457200" lvl="1" indent="0">
-              <a:buNone/>
-            </a:pPr>
-            <a:r>
-              <a:rPr lang="fr-FR" sz="2000" dirty="0" err="1"/>
-              <a:t>motor.move</a:t>
-            </a:r>
-            <a:r>
-              <a:rPr lang="fr-FR" sz="2000" dirty="0"/>
-              <a:t>(0) # tourne le servo à 0°</a:t>
-            </a:r>
-          </a:p>
-          <a:p>
-            <a:pPr marL="457200" lvl="1" indent="0">
-              <a:buNone/>
-            </a:pPr>
-            <a:r>
-              <a:rPr lang="fr-FR" sz="2000" dirty="0" err="1"/>
-              <a:t>time.sleep</a:t>
-            </a:r>
-            <a:r>
-              <a:rPr lang="fr-FR" sz="2000" dirty="0"/>
-              <a:t>(0.3)</a:t>
-            </a:r>
-          </a:p>
-        </p:txBody>
-      </p:sp>
-      <p:pic>
-        <p:nvPicPr>
-          <p:cNvPr id="3074" name="Picture 2" descr="Contrôle du servo SG90 avec ESP32">
-            <a:extLst>
-              <a:ext uri="{FF2B5EF4-FFF2-40B4-BE49-F238E27FC236}">
-                <a16:creationId xmlns:a16="http://schemas.microsoft.com/office/drawing/2014/main" id="{CDBC7EA0-608E-9083-5153-D1BDFEF4562F}"/>
-              </a:ext>
-            </a:extLst>
-          </p:cNvPr>
-          <p:cNvPicPr>
-            <a:picLocks noChangeAspect="1" noChangeArrowheads="1"/>
-          </p:cNvPicPr>
-          <p:nvPr/>
-        </p:nvPicPr>
-        <p:blipFill>
-          <a:blip r:embed="rId2">
-            <a:extLst>
-              <a:ext uri="{28A0092B-C50C-407E-A947-70E740481C1C}">
-                <a14:useLocalDpi xmlns:a14="http://schemas.microsoft.com/office/drawing/2010/main" val="0"/>
-              </a:ext>
-            </a:extLst>
-          </a:blip>
-          <a:srcRect/>
-          <a:stretch>
-            <a:fillRect/>
-          </a:stretch>
-        </p:blipFill>
-        <p:spPr bwMode="auto">
-          <a:xfrm>
-            <a:off x="5953125" y="3807633"/>
-            <a:ext cx="3190875" cy="3048000"/>
-          </a:xfrm>
-          <a:prstGeom prst="rect">
-            <a:avLst/>
-          </a:prstGeom>
-          <a:noFill/>
-          <a:extLst>
-            <a:ext uri="{909E8E84-426E-40DD-AFC4-6F175D3DCCD1}">
-              <a14:hiddenFill xmlns:a14="http://schemas.microsoft.com/office/drawing/2010/main">
-                <a:solidFill>
-                  <a:srgbClr val="FFFFFF"/>
-                </a:solidFill>
-              </a14:hiddenFill>
-            </a:ext>
-          </a:extLst>
-        </p:spPr>
-      </p:pic>
-    </p:spTree>
-    <p:extLst>
-      <p:ext uri="{BB962C8B-B14F-4D97-AF65-F5344CB8AC3E}">
-        <p14:creationId xmlns:p14="http://schemas.microsoft.com/office/powerpoint/2010/main" val="1293999495"/>
-      </p:ext>
-    </p:extLst>
-  </p:cSld>
-  <p:clrMapOvr>
-    <a:masterClrMapping/>
-  </p:clrMapOvr>
-</p:sld>
-</file>
-
-<file path=ppt/slides/slide9.xml><?xml version="1.0" encoding="utf-8"?>
-<p:sld xmlns:a="http://schemas.openxmlformats.org/drawingml/2006/main" xmlns:r="http://schemas.openxmlformats.org/officeDocument/2006/relationships" xmlns:p="http://schemas.openxmlformats.org/presentationml/2006/main">
-  <p:cSld>
-    <p:spTree>
-      <p:nvGrpSpPr>
-        <p:cNvPr id="1" name=""/>
-        <p:cNvGrpSpPr/>
-        <p:nvPr/>
-      </p:nvGrpSpPr>
-      <p:grpSpPr>
-        <a:xfrm>
-          <a:off x="0" y="0"/>
-          <a:ext cx="0" cy="0"/>
-          <a:chOff x="0" y="0"/>
-          <a:chExt cx="0" cy="0"/>
-        </a:xfrm>
-      </p:grpSpPr>
-      <p:sp>
-        <p:nvSpPr>
-          <p:cNvPr id="2" name="Titre 1">
-            <a:extLst>
-              <a:ext uri="{FF2B5EF4-FFF2-40B4-BE49-F238E27FC236}">
                 <a16:creationId xmlns:a16="http://schemas.microsoft.com/office/drawing/2014/main" id="{813C429A-F9AD-257E-E593-2E2B0D90F7AB}"/>
               </a:ext>
             </a:extLst>
@@ -6020,6 +3914,2300 @@
     <p:extLst>
       <p:ext uri="{BB962C8B-B14F-4D97-AF65-F5344CB8AC3E}">
         <p14:creationId xmlns:p14="http://schemas.microsoft.com/office/powerpoint/2010/main" val="1477769154"/>
+      </p:ext>
+    </p:extLst>
+  </p:cSld>
+  <p:clrMapOvr>
+    <a:masterClrMapping/>
+  </p:clrMapOvr>
+</p:sld>
+</file>
+
+<file path=ppt/slides/slide11.xml><?xml version="1.0" encoding="utf-8"?>
+<p:sld xmlns:a="http://schemas.openxmlformats.org/drawingml/2006/main" xmlns:r="http://schemas.openxmlformats.org/officeDocument/2006/relationships" xmlns:p="http://schemas.openxmlformats.org/presentationml/2006/main">
+  <p:cSld>
+    <p:spTree>
+      <p:nvGrpSpPr>
+        <p:cNvPr id="1" name=""/>
+        <p:cNvGrpSpPr/>
+        <p:nvPr/>
+      </p:nvGrpSpPr>
+      <p:grpSpPr>
+        <a:xfrm>
+          <a:off x="0" y="0"/>
+          <a:ext cx="0" cy="0"/>
+          <a:chOff x="0" y="0"/>
+          <a:chExt cx="0" cy="0"/>
+        </a:xfrm>
+      </p:grpSpPr>
+      <p:sp>
+        <p:nvSpPr>
+          <p:cNvPr id="2" name="Titre 1">
+            <a:extLst>
+              <a:ext uri="{FF2B5EF4-FFF2-40B4-BE49-F238E27FC236}">
+                <a16:creationId xmlns:a16="http://schemas.microsoft.com/office/drawing/2014/main" id="{6A32D2B3-C038-98AB-0C35-108C344B7596}"/>
+              </a:ext>
+            </a:extLst>
+          </p:cNvPr>
+          <p:cNvSpPr>
+            <a:spLocks noGrp="1"/>
+          </p:cNvSpPr>
+          <p:nvPr>
+            <p:ph type="title"/>
+          </p:nvPr>
+        </p:nvSpPr>
+        <p:spPr/>
+        <p:txBody>
+          <a:bodyPr/>
+          <a:lstStyle/>
+          <a:p>
+            <a:r>
+              <a:rPr lang="fr-FR" dirty="0"/>
+              <a:t>28BYJ-48</a:t>
+            </a:r>
+          </a:p>
+        </p:txBody>
+      </p:sp>
+      <p:sp>
+        <p:nvSpPr>
+          <p:cNvPr id="3" name="Espace réservé du contenu 2">
+            <a:extLst>
+              <a:ext uri="{FF2B5EF4-FFF2-40B4-BE49-F238E27FC236}">
+                <a16:creationId xmlns:a16="http://schemas.microsoft.com/office/drawing/2014/main" id="{DB30EC38-F0F8-8475-18A7-628BDE5422D8}"/>
+              </a:ext>
+            </a:extLst>
+          </p:cNvPr>
+          <p:cNvSpPr>
+            <a:spLocks noGrp="1"/>
+          </p:cNvSpPr>
+          <p:nvPr>
+            <p:ph idx="1"/>
+          </p:nvPr>
+        </p:nvSpPr>
+        <p:spPr/>
+        <p:txBody>
+          <a:bodyPr/>
+          <a:lstStyle/>
+          <a:p>
+            <a:r>
+              <a:rPr lang="fr-FR" dirty="0"/>
+              <a:t>Moteur pas à pas de 5v ou 12v</a:t>
+            </a:r>
+          </a:p>
+          <a:p>
+            <a:pPr lvl="1"/>
+            <a:r>
+              <a:rPr lang="fr-FR" dirty="0"/>
+              <a:t>512 pas</a:t>
+            </a:r>
+          </a:p>
+          <a:p>
+            <a:pPr lvl="1"/>
+            <a:r>
+              <a:rPr lang="fr-FR" dirty="0"/>
+              <a:t>0.18°</a:t>
+            </a:r>
+          </a:p>
+          <a:p>
+            <a:pPr lvl="1"/>
+            <a:r>
+              <a:rPr lang="fr-FR" dirty="0"/>
+              <a:t>Nécessite &gt; 200mA</a:t>
+            </a:r>
+          </a:p>
+          <a:p>
+            <a:pPr lvl="1"/>
+            <a:r>
+              <a:rPr lang="fr-FR" dirty="0"/>
+              <a:t>Ne peut pas être piloté seul, nécessite une carte</a:t>
+            </a:r>
+          </a:p>
+          <a:p>
+            <a:pPr lvl="1"/>
+            <a:endParaRPr lang="fr-FR" dirty="0"/>
+          </a:p>
+        </p:txBody>
+      </p:sp>
+      <p:pic>
+        <p:nvPicPr>
+          <p:cNvPr id="6146" name="Picture 2" descr="8BYJ-48 steper motor">
+            <a:extLst>
+              <a:ext uri="{FF2B5EF4-FFF2-40B4-BE49-F238E27FC236}">
+                <a16:creationId xmlns:a16="http://schemas.microsoft.com/office/drawing/2014/main" id="{5D49CA1D-68D9-2487-051F-5F5A2771ED6A}"/>
+              </a:ext>
+            </a:extLst>
+          </p:cNvPr>
+          <p:cNvPicPr>
+            <a:picLocks noChangeAspect="1" noChangeArrowheads="1"/>
+          </p:cNvPicPr>
+          <p:nvPr/>
+        </p:nvPicPr>
+        <p:blipFill>
+          <a:blip r:embed="rId2" cstate="print">
+            <a:extLst>
+              <a:ext uri="{28A0092B-C50C-407E-A947-70E740481C1C}">
+                <a14:useLocalDpi xmlns:a14="http://schemas.microsoft.com/office/drawing/2010/main" val="0"/>
+              </a:ext>
+            </a:extLst>
+          </a:blip>
+          <a:srcRect/>
+          <a:stretch>
+            <a:fillRect/>
+          </a:stretch>
+        </p:blipFill>
+        <p:spPr bwMode="auto">
+          <a:xfrm>
+            <a:off x="5292080" y="4149080"/>
+            <a:ext cx="3923928" cy="2464717"/>
+          </a:xfrm>
+          <a:prstGeom prst="rect">
+            <a:avLst/>
+          </a:prstGeom>
+          <a:noFill/>
+          <a:extLst>
+            <a:ext uri="{909E8E84-426E-40DD-AFC4-6F175D3DCCD1}">
+              <a14:hiddenFill xmlns:a14="http://schemas.microsoft.com/office/drawing/2010/main">
+                <a:solidFill>
+                  <a:srgbClr val="FFFFFF"/>
+                </a:solidFill>
+              </a14:hiddenFill>
+            </a:ext>
+          </a:extLst>
+        </p:spPr>
+      </p:pic>
+    </p:spTree>
+    <p:extLst>
+      <p:ext uri="{BB962C8B-B14F-4D97-AF65-F5344CB8AC3E}">
+        <p14:creationId xmlns:p14="http://schemas.microsoft.com/office/powerpoint/2010/main" val="3207234969"/>
+      </p:ext>
+    </p:extLst>
+  </p:cSld>
+  <p:clrMapOvr>
+    <a:masterClrMapping/>
+  </p:clrMapOvr>
+</p:sld>
+</file>
+
+<file path=ppt/slides/slide12.xml><?xml version="1.0" encoding="utf-8"?>
+<p:sld xmlns:a="http://schemas.openxmlformats.org/drawingml/2006/main" xmlns:r="http://schemas.openxmlformats.org/officeDocument/2006/relationships" xmlns:p="http://schemas.openxmlformats.org/presentationml/2006/main">
+  <p:cSld>
+    <p:spTree>
+      <p:nvGrpSpPr>
+        <p:cNvPr id="1" name=""/>
+        <p:cNvGrpSpPr/>
+        <p:nvPr/>
+      </p:nvGrpSpPr>
+      <p:grpSpPr>
+        <a:xfrm>
+          <a:off x="0" y="0"/>
+          <a:ext cx="0" cy="0"/>
+          <a:chOff x="0" y="0"/>
+          <a:chExt cx="0" cy="0"/>
+        </a:xfrm>
+      </p:grpSpPr>
+      <p:sp>
+        <p:nvSpPr>
+          <p:cNvPr id="2" name="Titre 1">
+            <a:extLst>
+              <a:ext uri="{FF2B5EF4-FFF2-40B4-BE49-F238E27FC236}">
+                <a16:creationId xmlns:a16="http://schemas.microsoft.com/office/drawing/2014/main" id="{C5B8B891-CFFF-FA11-BA2C-F16C0E5C0E90}"/>
+              </a:ext>
+            </a:extLst>
+          </p:cNvPr>
+          <p:cNvSpPr>
+            <a:spLocks noGrp="1"/>
+          </p:cNvSpPr>
+          <p:nvPr>
+            <p:ph type="title"/>
+          </p:nvPr>
+        </p:nvSpPr>
+        <p:spPr/>
+        <p:txBody>
+          <a:bodyPr/>
+          <a:lstStyle/>
+          <a:p>
+            <a:r>
+              <a:rPr lang="fr-FR" dirty="0"/>
+              <a:t>ULN2003</a:t>
+            </a:r>
+          </a:p>
+        </p:txBody>
+      </p:sp>
+      <p:sp>
+        <p:nvSpPr>
+          <p:cNvPr id="3" name="Espace réservé du contenu 2">
+            <a:extLst>
+              <a:ext uri="{FF2B5EF4-FFF2-40B4-BE49-F238E27FC236}">
+                <a16:creationId xmlns:a16="http://schemas.microsoft.com/office/drawing/2014/main" id="{4CC6F048-7988-B1A3-A71F-576E20B9FC91}"/>
+              </a:ext>
+            </a:extLst>
+          </p:cNvPr>
+          <p:cNvSpPr>
+            <a:spLocks noGrp="1"/>
+          </p:cNvSpPr>
+          <p:nvPr>
+            <p:ph idx="1"/>
+          </p:nvPr>
+        </p:nvSpPr>
+        <p:spPr/>
+        <p:txBody>
+          <a:bodyPr/>
+          <a:lstStyle/>
+          <a:p>
+            <a:r>
+              <a:rPr lang="fr-FR" dirty="0"/>
+              <a:t>Driver du 28BYJ-48</a:t>
+            </a:r>
+          </a:p>
+          <a:p>
+            <a:r>
+              <a:rPr lang="fr-FR" dirty="0"/>
+              <a:t>Compatible ESP32 et Arduino</a:t>
+            </a:r>
+          </a:p>
+          <a:p>
+            <a:pPr lvl="1"/>
+            <a:r>
+              <a:rPr lang="fr-FR" dirty="0"/>
+              <a:t>Nécessite du 5v</a:t>
+            </a:r>
+          </a:p>
+          <a:p>
+            <a:pPr lvl="1"/>
+            <a:r>
+              <a:rPr lang="fr-FR" dirty="0"/>
+              <a:t>Doit être alimenté depuis VIN 5v</a:t>
+            </a:r>
+          </a:p>
+        </p:txBody>
+      </p:sp>
+      <p:pic>
+        <p:nvPicPr>
+          <p:cNvPr id="7170" name="Picture 2" descr="ULN2003 Stepper Motor driver board">
+            <a:extLst>
+              <a:ext uri="{FF2B5EF4-FFF2-40B4-BE49-F238E27FC236}">
+                <a16:creationId xmlns:a16="http://schemas.microsoft.com/office/drawing/2014/main" id="{4F4725E4-0CD3-39CF-92B9-6B1282ED0B64}"/>
+              </a:ext>
+            </a:extLst>
+          </p:cNvPr>
+          <p:cNvPicPr>
+            <a:picLocks noChangeAspect="1" noChangeArrowheads="1"/>
+          </p:cNvPicPr>
+          <p:nvPr/>
+        </p:nvPicPr>
+        <p:blipFill>
+          <a:blip r:embed="rId2" cstate="print">
+            <a:extLst>
+              <a:ext uri="{28A0092B-C50C-407E-A947-70E740481C1C}">
+                <a14:useLocalDpi xmlns:a14="http://schemas.microsoft.com/office/drawing/2010/main" val="0"/>
+              </a:ext>
+            </a:extLst>
+          </a:blip>
+          <a:srcRect/>
+          <a:stretch>
+            <a:fillRect/>
+          </a:stretch>
+        </p:blipFill>
+        <p:spPr bwMode="auto">
+          <a:xfrm>
+            <a:off x="4626135" y="3348302"/>
+            <a:ext cx="4493590" cy="3515449"/>
+          </a:xfrm>
+          <a:prstGeom prst="rect">
+            <a:avLst/>
+          </a:prstGeom>
+          <a:noFill/>
+          <a:extLst>
+            <a:ext uri="{909E8E84-426E-40DD-AFC4-6F175D3DCCD1}">
+              <a14:hiddenFill xmlns:a14="http://schemas.microsoft.com/office/drawing/2010/main">
+                <a:solidFill>
+                  <a:srgbClr val="FFFFFF"/>
+                </a:solidFill>
+              </a14:hiddenFill>
+            </a:ext>
+          </a:extLst>
+        </p:spPr>
+      </p:pic>
+    </p:spTree>
+    <p:extLst>
+      <p:ext uri="{BB962C8B-B14F-4D97-AF65-F5344CB8AC3E}">
+        <p14:creationId xmlns:p14="http://schemas.microsoft.com/office/powerpoint/2010/main" val="1535404212"/>
+      </p:ext>
+    </p:extLst>
+  </p:cSld>
+  <p:clrMapOvr>
+    <a:masterClrMapping/>
+  </p:clrMapOvr>
+</p:sld>
+</file>
+
+<file path=ppt/slides/slide13.xml><?xml version="1.0" encoding="utf-8"?>
+<p:sld xmlns:a="http://schemas.openxmlformats.org/drawingml/2006/main" xmlns:r="http://schemas.openxmlformats.org/officeDocument/2006/relationships" xmlns:p="http://schemas.openxmlformats.org/presentationml/2006/main">
+  <p:cSld>
+    <p:spTree>
+      <p:nvGrpSpPr>
+        <p:cNvPr id="1" name=""/>
+        <p:cNvGrpSpPr/>
+        <p:nvPr/>
+      </p:nvGrpSpPr>
+      <p:grpSpPr>
+        <a:xfrm>
+          <a:off x="0" y="0"/>
+          <a:ext cx="0" cy="0"/>
+          <a:chOff x="0" y="0"/>
+          <a:chExt cx="0" cy="0"/>
+        </a:xfrm>
+      </p:grpSpPr>
+      <p:sp>
+        <p:nvSpPr>
+          <p:cNvPr id="2" name="Titre 1">
+            <a:extLst>
+              <a:ext uri="{FF2B5EF4-FFF2-40B4-BE49-F238E27FC236}">
+                <a16:creationId xmlns:a16="http://schemas.microsoft.com/office/drawing/2014/main" id="{0046FC80-E057-14EB-65AA-CBE9C4FC1B58}"/>
+              </a:ext>
+            </a:extLst>
+          </p:cNvPr>
+          <p:cNvSpPr>
+            <a:spLocks noGrp="1"/>
+          </p:cNvSpPr>
+          <p:nvPr>
+            <p:ph type="title"/>
+          </p:nvPr>
+        </p:nvSpPr>
+        <p:spPr/>
+        <p:txBody>
+          <a:bodyPr/>
+          <a:lstStyle/>
+          <a:p>
+            <a:r>
+              <a:rPr lang="fr-FR" dirty="0"/>
+              <a:t>ULN2003 </a:t>
+            </a:r>
+            <a:r>
+              <a:rPr lang="fr-FR" dirty="0" err="1"/>
+              <a:t>Pinout</a:t>
+            </a:r>
+            <a:endParaRPr lang="fr-FR" dirty="0"/>
+          </a:p>
+        </p:txBody>
+      </p:sp>
+      <p:sp>
+        <p:nvSpPr>
+          <p:cNvPr id="3" name="Espace réservé du contenu 2">
+            <a:extLst>
+              <a:ext uri="{FF2B5EF4-FFF2-40B4-BE49-F238E27FC236}">
+                <a16:creationId xmlns:a16="http://schemas.microsoft.com/office/drawing/2014/main" id="{0093BE69-1928-412D-20C9-F35A47B704DD}"/>
+              </a:ext>
+            </a:extLst>
+          </p:cNvPr>
+          <p:cNvSpPr>
+            <a:spLocks noGrp="1"/>
+          </p:cNvSpPr>
+          <p:nvPr>
+            <p:ph idx="1"/>
+          </p:nvPr>
+        </p:nvSpPr>
+        <p:spPr/>
+        <p:txBody>
+          <a:bodyPr/>
+          <a:lstStyle/>
+          <a:p>
+            <a:endParaRPr lang="fr-FR"/>
+          </a:p>
+        </p:txBody>
+      </p:sp>
+      <p:pic>
+        <p:nvPicPr>
+          <p:cNvPr id="5" name="Image 4">
+            <a:extLst>
+              <a:ext uri="{FF2B5EF4-FFF2-40B4-BE49-F238E27FC236}">
+                <a16:creationId xmlns:a16="http://schemas.microsoft.com/office/drawing/2014/main" id="{4367FE66-CA32-1CF1-9358-BAD1A83C44B7}"/>
+              </a:ext>
+            </a:extLst>
+          </p:cNvPr>
+          <p:cNvPicPr>
+            <a:picLocks noChangeAspect="1"/>
+          </p:cNvPicPr>
+          <p:nvPr/>
+        </p:nvPicPr>
+        <p:blipFill>
+          <a:blip r:embed="rId2"/>
+          <a:stretch>
+            <a:fillRect/>
+          </a:stretch>
+        </p:blipFill>
+        <p:spPr>
+          <a:xfrm>
+            <a:off x="-9463" y="1339054"/>
+            <a:ext cx="9144000" cy="5114282"/>
+          </a:xfrm>
+          <a:prstGeom prst="rect">
+            <a:avLst/>
+          </a:prstGeom>
+        </p:spPr>
+      </p:pic>
+    </p:spTree>
+    <p:extLst>
+      <p:ext uri="{BB962C8B-B14F-4D97-AF65-F5344CB8AC3E}">
+        <p14:creationId xmlns:p14="http://schemas.microsoft.com/office/powerpoint/2010/main" val="1087628126"/>
+      </p:ext>
+    </p:extLst>
+  </p:cSld>
+  <p:clrMapOvr>
+    <a:masterClrMapping/>
+  </p:clrMapOvr>
+</p:sld>
+</file>
+
+<file path=ppt/slides/slide14.xml><?xml version="1.0" encoding="utf-8"?>
+<p:sld xmlns:a="http://schemas.openxmlformats.org/drawingml/2006/main" xmlns:r="http://schemas.openxmlformats.org/officeDocument/2006/relationships" xmlns:p="http://schemas.openxmlformats.org/presentationml/2006/main">
+  <p:cSld>
+    <p:spTree>
+      <p:nvGrpSpPr>
+        <p:cNvPr id="1" name=""/>
+        <p:cNvGrpSpPr/>
+        <p:nvPr/>
+      </p:nvGrpSpPr>
+      <p:grpSpPr>
+        <a:xfrm>
+          <a:off x="0" y="0"/>
+          <a:ext cx="0" cy="0"/>
+          <a:chOff x="0" y="0"/>
+          <a:chExt cx="0" cy="0"/>
+        </a:xfrm>
+      </p:grpSpPr>
+      <p:sp>
+        <p:nvSpPr>
+          <p:cNvPr id="2" name="Titre 1">
+            <a:extLst>
+              <a:ext uri="{FF2B5EF4-FFF2-40B4-BE49-F238E27FC236}">
+                <a16:creationId xmlns:a16="http://schemas.microsoft.com/office/drawing/2014/main" id="{0FDAD532-A92D-5275-D95C-F29FC3947ECA}"/>
+              </a:ext>
+            </a:extLst>
+          </p:cNvPr>
+          <p:cNvSpPr>
+            <a:spLocks noGrp="1"/>
+          </p:cNvSpPr>
+          <p:nvPr>
+            <p:ph type="title"/>
+          </p:nvPr>
+        </p:nvSpPr>
+        <p:spPr/>
+        <p:txBody>
+          <a:bodyPr/>
+          <a:lstStyle/>
+          <a:p>
+            <a:r>
+              <a:rPr lang="fr-FR" dirty="0"/>
+              <a:t>ULN2003 Code</a:t>
+            </a:r>
+          </a:p>
+        </p:txBody>
+      </p:sp>
+      <p:sp>
+        <p:nvSpPr>
+          <p:cNvPr id="3" name="Espace réservé du contenu 2">
+            <a:extLst>
+              <a:ext uri="{FF2B5EF4-FFF2-40B4-BE49-F238E27FC236}">
+                <a16:creationId xmlns:a16="http://schemas.microsoft.com/office/drawing/2014/main" id="{2F738C54-E93F-A719-15CC-8E1CD46B33F6}"/>
+              </a:ext>
+            </a:extLst>
+          </p:cNvPr>
+          <p:cNvSpPr>
+            <a:spLocks noGrp="1"/>
+          </p:cNvSpPr>
+          <p:nvPr>
+            <p:ph idx="1"/>
+          </p:nvPr>
+        </p:nvSpPr>
+        <p:spPr/>
+        <p:txBody>
+          <a:bodyPr/>
+          <a:lstStyle/>
+          <a:p>
+            <a:r>
+              <a:rPr lang="en-US" dirty="0"/>
+              <a:t>Un peu difficile à </a:t>
+            </a:r>
+            <a:r>
+              <a:rPr lang="en-US" dirty="0" err="1"/>
+              <a:t>utiliser</a:t>
+            </a:r>
+            <a:endParaRPr lang="en-US" dirty="0"/>
+          </a:p>
+          <a:p>
+            <a:pPr marL="400050" lvl="1" indent="0">
+              <a:buNone/>
+            </a:pPr>
+            <a:r>
+              <a:rPr lang="en-US" sz="2000" dirty="0"/>
+              <a:t>from machine import Pin</a:t>
+            </a:r>
+          </a:p>
+          <a:p>
+            <a:pPr marL="400050" lvl="1" indent="0">
+              <a:buNone/>
+            </a:pPr>
+            <a:r>
+              <a:rPr lang="en-US" sz="2000" dirty="0"/>
+              <a:t>from time import sleep</a:t>
+            </a:r>
+          </a:p>
+          <a:p>
+            <a:pPr marL="400050" lvl="1" indent="0">
+              <a:buNone/>
+            </a:pPr>
+            <a:r>
+              <a:rPr lang="en-US" sz="2000" dirty="0"/>
+              <a:t>IN1 = Pin(26,Pin.OUT)</a:t>
+            </a:r>
+          </a:p>
+          <a:p>
+            <a:pPr marL="400050" lvl="1" indent="0">
+              <a:buNone/>
+            </a:pPr>
+            <a:r>
+              <a:rPr lang="en-US" sz="2000" dirty="0"/>
+              <a:t>IN2 = Pin(25,Pin.OUT)</a:t>
+            </a:r>
+          </a:p>
+          <a:p>
+            <a:pPr marL="400050" lvl="1" indent="0">
+              <a:buNone/>
+            </a:pPr>
+            <a:r>
+              <a:rPr lang="en-US" sz="2000" dirty="0"/>
+              <a:t>IN3 = Pin(33,Pin.OUT)</a:t>
+            </a:r>
+          </a:p>
+          <a:p>
+            <a:pPr marL="400050" lvl="1" indent="0">
+              <a:buNone/>
+            </a:pPr>
+            <a:r>
+              <a:rPr lang="en-US" sz="2000" dirty="0"/>
+              <a:t>IN4 = Pin(32,Pin.OUT)</a:t>
+            </a:r>
+          </a:p>
+          <a:p>
+            <a:pPr marL="400050" lvl="1" indent="0">
+              <a:buNone/>
+            </a:pPr>
+            <a:r>
+              <a:rPr lang="en-US" sz="2000" dirty="0"/>
+              <a:t>pins = [IN1, IN2, IN3, IN4]</a:t>
+            </a:r>
+          </a:p>
+          <a:p>
+            <a:pPr marL="400050" lvl="1" indent="0">
+              <a:buNone/>
+            </a:pPr>
+            <a:r>
+              <a:rPr lang="en-US" sz="2000" dirty="0"/>
+              <a:t>sequence = [[1,0,0,0],[0,1,0,0],[0,0,1,0],[0,0,0,1]]</a:t>
+            </a:r>
+          </a:p>
+          <a:p>
+            <a:pPr marL="400050" lvl="1" indent="0">
+              <a:buNone/>
+            </a:pPr>
+            <a:r>
+              <a:rPr lang="en-US" sz="2000" dirty="0"/>
+              <a:t>while True:</a:t>
+            </a:r>
+          </a:p>
+          <a:p>
+            <a:pPr marL="400050" lvl="1" indent="0">
+              <a:buNone/>
+            </a:pPr>
+            <a:r>
+              <a:rPr lang="en-US" sz="2000" dirty="0"/>
+              <a:t>    for step in sequence:</a:t>
+            </a:r>
+          </a:p>
+          <a:p>
+            <a:pPr marL="400050" lvl="1" indent="0">
+              <a:buNone/>
+            </a:pPr>
+            <a:r>
+              <a:rPr lang="en-US" sz="2000" dirty="0"/>
+              <a:t>        for </a:t>
+            </a:r>
+            <a:r>
+              <a:rPr lang="en-US" sz="2000" dirty="0" err="1"/>
+              <a:t>i</a:t>
+            </a:r>
+            <a:r>
+              <a:rPr lang="en-US" sz="2000" dirty="0"/>
+              <a:t> in range(</a:t>
+            </a:r>
+            <a:r>
+              <a:rPr lang="en-US" sz="2000" dirty="0" err="1"/>
+              <a:t>len</a:t>
+            </a:r>
+            <a:r>
+              <a:rPr lang="en-US" sz="2000" dirty="0"/>
+              <a:t>(pins)):</a:t>
+            </a:r>
+          </a:p>
+          <a:p>
+            <a:pPr marL="400050" lvl="1" indent="0">
+              <a:buNone/>
+            </a:pPr>
+            <a:r>
+              <a:rPr lang="en-US" sz="2000" dirty="0"/>
+              <a:t>            pins[</a:t>
+            </a:r>
+            <a:r>
+              <a:rPr lang="en-US" sz="2000" dirty="0" err="1"/>
+              <a:t>i</a:t>
+            </a:r>
+            <a:r>
+              <a:rPr lang="en-US" sz="2000" dirty="0"/>
+              <a:t>].value(step[</a:t>
+            </a:r>
+            <a:r>
+              <a:rPr lang="en-US" sz="2000" dirty="0" err="1"/>
+              <a:t>i</a:t>
+            </a:r>
+            <a:r>
+              <a:rPr lang="en-US" sz="2000" dirty="0"/>
+              <a:t>])</a:t>
+            </a:r>
+          </a:p>
+          <a:p>
+            <a:pPr marL="400050" lvl="1" indent="0">
+              <a:buNone/>
+            </a:pPr>
+            <a:r>
+              <a:rPr lang="en-US" sz="2000" dirty="0"/>
+              <a:t>            sleep(0.001)</a:t>
+            </a:r>
+            <a:endParaRPr lang="fr-FR" sz="4000" dirty="0"/>
+          </a:p>
+        </p:txBody>
+      </p:sp>
+    </p:spTree>
+    <p:extLst>
+      <p:ext uri="{BB962C8B-B14F-4D97-AF65-F5344CB8AC3E}">
+        <p14:creationId xmlns:p14="http://schemas.microsoft.com/office/powerpoint/2010/main" val="415770773"/>
+      </p:ext>
+    </p:extLst>
+  </p:cSld>
+  <p:clrMapOvr>
+    <a:masterClrMapping/>
+  </p:clrMapOvr>
+</p:sld>
+</file>
+
+<file path=ppt/slides/slide15.xml><?xml version="1.0" encoding="utf-8"?>
+<p:sld xmlns:a="http://schemas.openxmlformats.org/drawingml/2006/main" xmlns:r="http://schemas.openxmlformats.org/officeDocument/2006/relationships" xmlns:p="http://schemas.openxmlformats.org/presentationml/2006/main">
+  <p:cSld>
+    <p:spTree>
+      <p:nvGrpSpPr>
+        <p:cNvPr id="1" name=""/>
+        <p:cNvGrpSpPr/>
+        <p:nvPr/>
+      </p:nvGrpSpPr>
+      <p:grpSpPr>
+        <a:xfrm>
+          <a:off x="0" y="0"/>
+          <a:ext cx="0" cy="0"/>
+          <a:chOff x="0" y="0"/>
+          <a:chExt cx="0" cy="0"/>
+        </a:xfrm>
+      </p:grpSpPr>
+      <p:sp>
+        <p:nvSpPr>
+          <p:cNvPr id="2" name="Titre 1">
+            <a:extLst>
+              <a:ext uri="{FF2B5EF4-FFF2-40B4-BE49-F238E27FC236}">
+                <a16:creationId xmlns:a16="http://schemas.microsoft.com/office/drawing/2014/main" id="{92DC0A81-C27C-E786-5235-F60F3329C18A}"/>
+              </a:ext>
+            </a:extLst>
+          </p:cNvPr>
+          <p:cNvSpPr>
+            <a:spLocks noGrp="1"/>
+          </p:cNvSpPr>
+          <p:nvPr>
+            <p:ph type="title"/>
+          </p:nvPr>
+        </p:nvSpPr>
+        <p:spPr/>
+        <p:txBody>
+          <a:bodyPr/>
+          <a:lstStyle/>
+          <a:p>
+            <a:r>
+              <a:rPr lang="fr-FR" dirty="0"/>
+              <a:t>uln2003.py</a:t>
+            </a:r>
+          </a:p>
+        </p:txBody>
+      </p:sp>
+      <p:sp>
+        <p:nvSpPr>
+          <p:cNvPr id="3" name="Espace réservé du contenu 2">
+            <a:extLst>
+              <a:ext uri="{FF2B5EF4-FFF2-40B4-BE49-F238E27FC236}">
+                <a16:creationId xmlns:a16="http://schemas.microsoft.com/office/drawing/2014/main" id="{678C997F-BA07-B579-2462-68D37D4FF566}"/>
+              </a:ext>
+            </a:extLst>
+          </p:cNvPr>
+          <p:cNvSpPr>
+            <a:spLocks noGrp="1"/>
+          </p:cNvSpPr>
+          <p:nvPr>
+            <p:ph idx="1"/>
+          </p:nvPr>
+        </p:nvSpPr>
+        <p:spPr/>
+        <p:txBody>
+          <a:bodyPr/>
+          <a:lstStyle/>
+          <a:p>
+            <a:r>
+              <a:rPr lang="fr-FR" dirty="0"/>
+              <a:t>Librairie Python pour simplifier le code</a:t>
+            </a:r>
+          </a:p>
+          <a:p>
+            <a:pPr marL="400050" lvl="1" indent="0">
+              <a:buNone/>
+            </a:pPr>
+            <a:r>
+              <a:rPr lang="fr-FR" dirty="0"/>
+              <a:t>s1 = Stepper(HALF_STEP, pin16, pin15, </a:t>
+            </a:r>
+            <a:r>
+              <a:rPr lang="fr-FR"/>
+              <a:t>pin14, pin13</a:t>
+            </a:r>
+            <a:r>
+              <a:rPr lang="fr-FR" dirty="0"/>
+              <a:t>, </a:t>
+            </a:r>
+            <a:r>
+              <a:rPr lang="fr-FR" dirty="0" err="1"/>
+              <a:t>delay</a:t>
+            </a:r>
+            <a:r>
+              <a:rPr lang="fr-FR" dirty="0"/>
+              <a:t>=5)  </a:t>
+            </a:r>
+          </a:p>
+          <a:p>
+            <a:pPr marL="400050" lvl="1" indent="0">
+              <a:buNone/>
+            </a:pPr>
+            <a:r>
+              <a:rPr lang="fr-FR" dirty="0"/>
+              <a:t>s1.step(100)     # </a:t>
+            </a:r>
+            <a:r>
+              <a:rPr lang="fr-FR" dirty="0" err="1"/>
+              <a:t>Rotate</a:t>
+            </a:r>
+            <a:r>
+              <a:rPr lang="fr-FR" dirty="0"/>
+              <a:t> 100 </a:t>
+            </a:r>
+            <a:r>
+              <a:rPr lang="fr-FR" dirty="0" err="1"/>
+              <a:t>steps</a:t>
+            </a:r>
+            <a:r>
+              <a:rPr lang="fr-FR" dirty="0"/>
+              <a:t> </a:t>
+            </a:r>
+            <a:r>
+              <a:rPr lang="fr-FR" dirty="0" err="1"/>
+              <a:t>clockwise</a:t>
+            </a:r>
+            <a:endParaRPr lang="fr-FR" dirty="0"/>
+          </a:p>
+          <a:p>
+            <a:pPr marL="400050" lvl="1" indent="0">
+              <a:buNone/>
+            </a:pPr>
+            <a:r>
+              <a:rPr lang="fr-FR" dirty="0"/>
+              <a:t>s1.step(100, -1) # </a:t>
+            </a:r>
+            <a:r>
+              <a:rPr lang="fr-FR" dirty="0" err="1"/>
+              <a:t>Rotate</a:t>
+            </a:r>
+            <a:r>
+              <a:rPr lang="fr-FR" dirty="0"/>
+              <a:t> 100 </a:t>
+            </a:r>
+            <a:r>
+              <a:rPr lang="fr-FR" dirty="0" err="1"/>
+              <a:t>steps</a:t>
+            </a:r>
+            <a:r>
+              <a:rPr lang="fr-FR" dirty="0"/>
+              <a:t> anti-</a:t>
+            </a:r>
+            <a:r>
+              <a:rPr lang="fr-FR" dirty="0" err="1"/>
+              <a:t>clockwise</a:t>
+            </a:r>
+            <a:endParaRPr lang="fr-FR" dirty="0"/>
+          </a:p>
+          <a:p>
+            <a:pPr marL="400050" lvl="1" indent="0">
+              <a:buNone/>
+            </a:pPr>
+            <a:r>
+              <a:rPr lang="fr-FR" dirty="0"/>
+              <a:t>s1.step(FULL_ROTATION)</a:t>
+            </a:r>
+          </a:p>
+        </p:txBody>
+      </p:sp>
+    </p:spTree>
+    <p:extLst>
+      <p:ext uri="{BB962C8B-B14F-4D97-AF65-F5344CB8AC3E}">
+        <p14:creationId xmlns:p14="http://schemas.microsoft.com/office/powerpoint/2010/main" val="3092848619"/>
+      </p:ext>
+    </p:extLst>
+  </p:cSld>
+  <p:clrMapOvr>
+    <a:masterClrMapping/>
+  </p:clrMapOvr>
+</p:sld>
+</file>
+
+<file path=ppt/slides/slide2.xml><?xml version="1.0" encoding="utf-8"?>
+<p:sld xmlns:a="http://schemas.openxmlformats.org/drawingml/2006/main" xmlns:r="http://schemas.openxmlformats.org/officeDocument/2006/relationships" xmlns:p="http://schemas.openxmlformats.org/presentationml/2006/main">
+  <p:cSld>
+    <p:spTree>
+      <p:nvGrpSpPr>
+        <p:cNvPr id="1" name=""/>
+        <p:cNvGrpSpPr/>
+        <p:nvPr/>
+      </p:nvGrpSpPr>
+      <p:grpSpPr>
+        <a:xfrm>
+          <a:off x="0" y="0"/>
+          <a:ext cx="0" cy="0"/>
+          <a:chOff x="0" y="0"/>
+          <a:chExt cx="0" cy="0"/>
+        </a:xfrm>
+      </p:grpSpPr>
+      <p:sp>
+        <p:nvSpPr>
+          <p:cNvPr id="2" name="Titre 1">
+            <a:extLst>
+              <a:ext uri="{FF2B5EF4-FFF2-40B4-BE49-F238E27FC236}">
+                <a16:creationId xmlns:a16="http://schemas.microsoft.com/office/drawing/2014/main" id="{2DAB3588-E462-5263-490F-858B3BEABC6E}"/>
+              </a:ext>
+            </a:extLst>
+          </p:cNvPr>
+          <p:cNvSpPr>
+            <a:spLocks noGrp="1"/>
+          </p:cNvSpPr>
+          <p:nvPr>
+            <p:ph type="title"/>
+          </p:nvPr>
+        </p:nvSpPr>
+        <p:spPr/>
+        <p:txBody>
+          <a:bodyPr/>
+          <a:lstStyle/>
+          <a:p>
+            <a:r>
+              <a:rPr lang="fr-FR" dirty="0"/>
+              <a:t>Les moteurs</a:t>
+            </a:r>
+          </a:p>
+        </p:txBody>
+      </p:sp>
+      <p:sp>
+        <p:nvSpPr>
+          <p:cNvPr id="3" name="Espace réservé du contenu 2">
+            <a:extLst>
+              <a:ext uri="{FF2B5EF4-FFF2-40B4-BE49-F238E27FC236}">
+                <a16:creationId xmlns:a16="http://schemas.microsoft.com/office/drawing/2014/main" id="{5AAF5B72-D9FD-A22A-9EEA-50000A83530C}"/>
+              </a:ext>
+            </a:extLst>
+          </p:cNvPr>
+          <p:cNvSpPr>
+            <a:spLocks noGrp="1"/>
+          </p:cNvSpPr>
+          <p:nvPr>
+            <p:ph idx="1"/>
+          </p:nvPr>
+        </p:nvSpPr>
+        <p:spPr/>
+        <p:txBody>
+          <a:bodyPr/>
+          <a:lstStyle/>
+          <a:p>
+            <a:r>
+              <a:rPr lang="fr-FR" dirty="0"/>
+              <a:t>Il existe différents types de moteurs électriques</a:t>
+            </a:r>
+          </a:p>
+          <a:p>
+            <a:pPr lvl="1"/>
+            <a:r>
+              <a:rPr lang="fr-FR" dirty="0"/>
+              <a:t>A engrenage</a:t>
+            </a:r>
+          </a:p>
+          <a:p>
+            <a:pPr lvl="1"/>
+            <a:r>
+              <a:rPr lang="fr-FR" dirty="0"/>
+              <a:t>A broche</a:t>
+            </a:r>
+          </a:p>
+          <a:p>
+            <a:pPr lvl="1"/>
+            <a:r>
+              <a:rPr lang="fr-FR" dirty="0" err="1"/>
+              <a:t>Brushless</a:t>
+            </a:r>
+            <a:endParaRPr lang="fr-FR" dirty="0"/>
+          </a:p>
+          <a:p>
+            <a:pPr lvl="1"/>
+            <a:r>
+              <a:rPr lang="fr-FR" dirty="0"/>
+              <a:t>Servomoteurs</a:t>
+            </a:r>
+          </a:p>
+          <a:p>
+            <a:pPr lvl="1"/>
+            <a:r>
+              <a:rPr lang="fr-FR" dirty="0"/>
+              <a:t>Pas à pas</a:t>
+            </a:r>
+          </a:p>
+          <a:p>
+            <a:pPr lvl="1"/>
+            <a:r>
+              <a:rPr lang="fr-FR" dirty="0"/>
+              <a:t>…</a:t>
+            </a:r>
+          </a:p>
+          <a:p>
+            <a:pPr lvl="1"/>
+            <a:endParaRPr lang="fr-FR" dirty="0"/>
+          </a:p>
+          <a:p>
+            <a:pPr lvl="1"/>
+            <a:endParaRPr lang="fr-FR" dirty="0"/>
+          </a:p>
+          <a:p>
+            <a:pPr lvl="1"/>
+            <a:endParaRPr lang="fr-FR" dirty="0"/>
+          </a:p>
+        </p:txBody>
+      </p:sp>
+    </p:spTree>
+    <p:extLst>
+      <p:ext uri="{BB962C8B-B14F-4D97-AF65-F5344CB8AC3E}">
+        <p14:creationId xmlns:p14="http://schemas.microsoft.com/office/powerpoint/2010/main" val="23088078"/>
+      </p:ext>
+    </p:extLst>
+  </p:cSld>
+  <p:clrMapOvr>
+    <a:masterClrMapping/>
+  </p:clrMapOvr>
+</p:sld>
+</file>
+
+<file path=ppt/slides/slide3.xml><?xml version="1.0" encoding="utf-8"?>
+<p:sld xmlns:a="http://schemas.openxmlformats.org/drawingml/2006/main" xmlns:r="http://schemas.openxmlformats.org/officeDocument/2006/relationships" xmlns:p="http://schemas.openxmlformats.org/presentationml/2006/main">
+  <p:cSld>
+    <p:spTree>
+      <p:nvGrpSpPr>
+        <p:cNvPr id="1" name=""/>
+        <p:cNvGrpSpPr/>
+        <p:nvPr/>
+      </p:nvGrpSpPr>
+      <p:grpSpPr>
+        <a:xfrm>
+          <a:off x="0" y="0"/>
+          <a:ext cx="0" cy="0"/>
+          <a:chOff x="0" y="0"/>
+          <a:chExt cx="0" cy="0"/>
+        </a:xfrm>
+      </p:grpSpPr>
+      <p:sp>
+        <p:nvSpPr>
+          <p:cNvPr id="2" name="Titre 1">
+            <a:extLst>
+              <a:ext uri="{FF2B5EF4-FFF2-40B4-BE49-F238E27FC236}">
+                <a16:creationId xmlns:a16="http://schemas.microsoft.com/office/drawing/2014/main" id="{2EFC4C4E-8947-0112-4414-B457B2BB6CEB}"/>
+              </a:ext>
+            </a:extLst>
+          </p:cNvPr>
+          <p:cNvSpPr>
+            <a:spLocks noGrp="1"/>
+          </p:cNvSpPr>
+          <p:nvPr>
+            <p:ph type="title"/>
+          </p:nvPr>
+        </p:nvSpPr>
+        <p:spPr/>
+        <p:txBody>
+          <a:bodyPr/>
+          <a:lstStyle/>
+          <a:p>
+            <a:r>
+              <a:rPr lang="fr-FR" dirty="0"/>
+              <a:t>Moteurs à engrenage</a:t>
+            </a:r>
+          </a:p>
+        </p:txBody>
+      </p:sp>
+      <p:sp>
+        <p:nvSpPr>
+          <p:cNvPr id="3" name="Espace réservé du contenu 2">
+            <a:extLst>
+              <a:ext uri="{FF2B5EF4-FFF2-40B4-BE49-F238E27FC236}">
+                <a16:creationId xmlns:a16="http://schemas.microsoft.com/office/drawing/2014/main" id="{FCDBD5FE-3D09-564E-5017-449CE5734959}"/>
+              </a:ext>
+            </a:extLst>
+          </p:cNvPr>
+          <p:cNvSpPr>
+            <a:spLocks noGrp="1"/>
+          </p:cNvSpPr>
+          <p:nvPr>
+            <p:ph idx="1"/>
+          </p:nvPr>
+        </p:nvSpPr>
+        <p:spPr/>
+        <p:txBody>
+          <a:bodyPr/>
+          <a:lstStyle/>
+          <a:p>
+            <a:r>
+              <a:rPr lang="fr-FR" dirty="0"/>
+              <a:t>Fiable et peu chère</a:t>
+            </a:r>
+          </a:p>
+          <a:p>
+            <a:r>
+              <a:rPr lang="fr-FR" dirty="0"/>
+              <a:t>Vitesse constante pour une tension donnée</a:t>
+            </a:r>
+          </a:p>
+          <a:p>
+            <a:pPr lvl="1"/>
+            <a:r>
+              <a:rPr lang="fr-FR" dirty="0"/>
+              <a:t>Tension: 3.0V Vitesse à vide: 5800rpm Courant: 120mA</a:t>
+            </a:r>
+          </a:p>
+          <a:p>
+            <a:pPr lvl="1"/>
+            <a:r>
+              <a:rPr lang="fr-FR" dirty="0"/>
+              <a:t>Tension: 5.0V Vitesse à vide: 9800rpm Courant: 140mA</a:t>
+            </a:r>
+          </a:p>
+          <a:p>
+            <a:pPr lvl="1"/>
+            <a:r>
+              <a:rPr lang="fr-FR" dirty="0"/>
+              <a:t>Tension: 6.0V Vitesse à vide: 11500rpm Courant: 150mA</a:t>
+            </a:r>
+          </a:p>
+          <a:p>
+            <a:pPr lvl="1"/>
+            <a:r>
+              <a:rPr lang="fr-FR" dirty="0"/>
+              <a:t>Tension: 7.4V Vitesse à vide: 14500rpm Courant: 170mA</a:t>
+            </a:r>
+          </a:p>
+        </p:txBody>
+      </p:sp>
+      <p:pic>
+        <p:nvPicPr>
+          <p:cNvPr id="5" name="Image 4">
+            <a:extLst>
+              <a:ext uri="{FF2B5EF4-FFF2-40B4-BE49-F238E27FC236}">
+                <a16:creationId xmlns:a16="http://schemas.microsoft.com/office/drawing/2014/main" id="{8767505E-0694-F7EC-6A0B-59EF33366C32}"/>
+              </a:ext>
+            </a:extLst>
+          </p:cNvPr>
+          <p:cNvPicPr>
+            <a:picLocks noChangeAspect="1"/>
+          </p:cNvPicPr>
+          <p:nvPr/>
+        </p:nvPicPr>
+        <p:blipFill>
+          <a:blip r:embed="rId2"/>
+          <a:stretch>
+            <a:fillRect/>
+          </a:stretch>
+        </p:blipFill>
+        <p:spPr>
+          <a:xfrm>
+            <a:off x="3131840" y="4238901"/>
+            <a:ext cx="3368466" cy="2223277"/>
+          </a:xfrm>
+          <a:prstGeom prst="rect">
+            <a:avLst/>
+          </a:prstGeom>
+        </p:spPr>
+      </p:pic>
+    </p:spTree>
+    <p:extLst>
+      <p:ext uri="{BB962C8B-B14F-4D97-AF65-F5344CB8AC3E}">
+        <p14:creationId xmlns:p14="http://schemas.microsoft.com/office/powerpoint/2010/main" val="588864771"/>
+      </p:ext>
+    </p:extLst>
+  </p:cSld>
+  <p:clrMapOvr>
+    <a:masterClrMapping/>
+  </p:clrMapOvr>
+</p:sld>
+</file>
+
+<file path=ppt/slides/slide4.xml><?xml version="1.0" encoding="utf-8"?>
+<p:sld xmlns:a="http://schemas.openxmlformats.org/drawingml/2006/main" xmlns:r="http://schemas.openxmlformats.org/officeDocument/2006/relationships" xmlns:p="http://schemas.openxmlformats.org/presentationml/2006/main">
+  <p:cSld>
+    <p:spTree>
+      <p:nvGrpSpPr>
+        <p:cNvPr id="1" name=""/>
+        <p:cNvGrpSpPr/>
+        <p:nvPr/>
+      </p:nvGrpSpPr>
+      <p:grpSpPr>
+        <a:xfrm>
+          <a:off x="0" y="0"/>
+          <a:ext cx="0" cy="0"/>
+          <a:chOff x="0" y="0"/>
+          <a:chExt cx="0" cy="0"/>
+        </a:xfrm>
+      </p:grpSpPr>
+      <p:sp>
+        <p:nvSpPr>
+          <p:cNvPr id="2" name="Titre 1">
+            <a:extLst>
+              <a:ext uri="{FF2B5EF4-FFF2-40B4-BE49-F238E27FC236}">
+                <a16:creationId xmlns:a16="http://schemas.microsoft.com/office/drawing/2014/main" id="{BE2DA72C-3180-D864-8C2F-CD22BE20DA3C}"/>
+              </a:ext>
+            </a:extLst>
+          </p:cNvPr>
+          <p:cNvSpPr>
+            <a:spLocks noGrp="1"/>
+          </p:cNvSpPr>
+          <p:nvPr>
+            <p:ph type="title"/>
+          </p:nvPr>
+        </p:nvSpPr>
+        <p:spPr/>
+        <p:txBody>
+          <a:bodyPr/>
+          <a:lstStyle/>
+          <a:p>
+            <a:r>
+              <a:rPr lang="fr-FR" dirty="0"/>
+              <a:t>Servomoteurs</a:t>
+            </a:r>
+          </a:p>
+        </p:txBody>
+      </p:sp>
+      <p:sp>
+        <p:nvSpPr>
+          <p:cNvPr id="3" name="Espace réservé du contenu 2">
+            <a:extLst>
+              <a:ext uri="{FF2B5EF4-FFF2-40B4-BE49-F238E27FC236}">
+                <a16:creationId xmlns:a16="http://schemas.microsoft.com/office/drawing/2014/main" id="{C118CE0B-F517-53D3-4A6A-A322597DEE80}"/>
+              </a:ext>
+            </a:extLst>
+          </p:cNvPr>
+          <p:cNvSpPr>
+            <a:spLocks noGrp="1"/>
+          </p:cNvSpPr>
+          <p:nvPr>
+            <p:ph idx="1"/>
+          </p:nvPr>
+        </p:nvSpPr>
+        <p:spPr/>
+        <p:txBody>
+          <a:bodyPr/>
+          <a:lstStyle/>
+          <a:p>
+            <a:r>
+              <a:rPr lang="fr-FR" dirty="0"/>
+              <a:t>Un servomoteur est un moteur capable de maintenir une opposition à un effort statique et dont la position est vérifiée en continu et corrigée en fonction de la mesure</a:t>
+            </a:r>
+          </a:p>
+          <a:p>
+            <a:pPr lvl="1"/>
+            <a:r>
+              <a:rPr lang="fr-FR" dirty="0"/>
+              <a:t>C'est donc un système asservi en position</a:t>
+            </a:r>
+          </a:p>
+          <a:p>
+            <a:pPr lvl="1"/>
+            <a:r>
+              <a:rPr lang="fr-FR" dirty="0"/>
+              <a:t>Servomoteur de 180° : gestion précise de l'angle</a:t>
+            </a:r>
+          </a:p>
+          <a:p>
+            <a:pPr lvl="1"/>
+            <a:r>
+              <a:rPr lang="fr-FR" dirty="0"/>
+              <a:t>Utilisé pour les vannes et le modélisme</a:t>
+            </a:r>
+          </a:p>
+          <a:p>
+            <a:pPr lvl="1"/>
+            <a:r>
+              <a:rPr lang="fr-FR" dirty="0"/>
+              <a:t>Servomoteur de 360° : gestion précise de la </a:t>
+            </a:r>
+            <a:r>
+              <a:rPr lang="fr-FR" dirty="0" err="1"/>
+              <a:t>vitrsse</a:t>
+            </a:r>
+            <a:r>
+              <a:rPr lang="fr-FR" dirty="0"/>
+              <a:t> de rotation</a:t>
+            </a:r>
+          </a:p>
+        </p:txBody>
+      </p:sp>
+    </p:spTree>
+    <p:extLst>
+      <p:ext uri="{BB962C8B-B14F-4D97-AF65-F5344CB8AC3E}">
+        <p14:creationId xmlns:p14="http://schemas.microsoft.com/office/powerpoint/2010/main" val="2651195148"/>
+      </p:ext>
+    </p:extLst>
+  </p:cSld>
+  <p:clrMapOvr>
+    <a:masterClrMapping/>
+  </p:clrMapOvr>
+</p:sld>
+</file>
+
+<file path=ppt/slides/slide5.xml><?xml version="1.0" encoding="utf-8"?>
+<p:sld xmlns:a="http://schemas.openxmlformats.org/drawingml/2006/main" xmlns:r="http://schemas.openxmlformats.org/officeDocument/2006/relationships" xmlns:p="http://schemas.openxmlformats.org/presentationml/2006/main">
+  <p:cSld>
+    <p:spTree>
+      <p:nvGrpSpPr>
+        <p:cNvPr id="1" name=""/>
+        <p:cNvGrpSpPr/>
+        <p:nvPr/>
+      </p:nvGrpSpPr>
+      <p:grpSpPr>
+        <a:xfrm>
+          <a:off x="0" y="0"/>
+          <a:ext cx="0" cy="0"/>
+          <a:chOff x="0" y="0"/>
+          <a:chExt cx="0" cy="0"/>
+        </a:xfrm>
+      </p:grpSpPr>
+      <p:sp>
+        <p:nvSpPr>
+          <p:cNvPr id="2" name="Titre 1">
+            <a:extLst>
+              <a:ext uri="{FF2B5EF4-FFF2-40B4-BE49-F238E27FC236}">
+                <a16:creationId xmlns:a16="http://schemas.microsoft.com/office/drawing/2014/main" id="{02C492B7-2074-4CDB-640E-FABE6D44B1B3}"/>
+              </a:ext>
+            </a:extLst>
+          </p:cNvPr>
+          <p:cNvSpPr>
+            <a:spLocks noGrp="1"/>
+          </p:cNvSpPr>
+          <p:nvPr>
+            <p:ph type="title"/>
+          </p:nvPr>
+        </p:nvSpPr>
+        <p:spPr/>
+        <p:txBody>
+          <a:bodyPr/>
+          <a:lstStyle/>
+          <a:p>
+            <a:r>
+              <a:rPr lang="fr-FR" dirty="0"/>
+              <a:t>SG90</a:t>
+            </a:r>
+          </a:p>
+        </p:txBody>
+      </p:sp>
+      <p:sp>
+        <p:nvSpPr>
+          <p:cNvPr id="3" name="Espace réservé du contenu 2">
+            <a:extLst>
+              <a:ext uri="{FF2B5EF4-FFF2-40B4-BE49-F238E27FC236}">
+                <a16:creationId xmlns:a16="http://schemas.microsoft.com/office/drawing/2014/main" id="{6ED4D8E9-C625-E0C1-ED38-10557D5AB72A}"/>
+              </a:ext>
+            </a:extLst>
+          </p:cNvPr>
+          <p:cNvSpPr>
+            <a:spLocks noGrp="1"/>
+          </p:cNvSpPr>
+          <p:nvPr>
+            <p:ph idx="1"/>
+          </p:nvPr>
+        </p:nvSpPr>
+        <p:spPr/>
+        <p:txBody>
+          <a:bodyPr/>
+          <a:lstStyle/>
+          <a:p>
+            <a:r>
+              <a:rPr lang="fr-FR" dirty="0"/>
+              <a:t>Les servomoteurs sont une forme particulière de moteurs qui peuvent être fixés à une position spécifique avec une grande précision</a:t>
+            </a:r>
+          </a:p>
+          <a:p>
+            <a:r>
+              <a:rPr lang="fr-FR" dirty="0"/>
+              <a:t>Cette position est maintenue pour jusqu’à ce qu’une nouvelle instruction soit donnée.</a:t>
+            </a:r>
+          </a:p>
+          <a:p>
+            <a:r>
+              <a:rPr lang="fr-FR" dirty="0"/>
+              <a:t>Les servomoteurs SG90 ont un excellent rapport poids puissance</a:t>
+            </a:r>
+          </a:p>
+          <a:p>
+            <a:pPr lvl="1"/>
+            <a:r>
+              <a:rPr lang="fr-FR" dirty="0"/>
+              <a:t>Couple de 1,5 kg/cm</a:t>
+            </a:r>
+          </a:p>
+          <a:p>
+            <a:pPr lvl="1"/>
+            <a:r>
+              <a:rPr lang="fr-FR" dirty="0"/>
+              <a:t>pour seulement 9g</a:t>
+            </a:r>
+          </a:p>
+        </p:txBody>
+      </p:sp>
+      <p:pic>
+        <p:nvPicPr>
+          <p:cNvPr id="1026" name="Picture 2" descr="Schéma interne servomoteur">
+            <a:extLst>
+              <a:ext uri="{FF2B5EF4-FFF2-40B4-BE49-F238E27FC236}">
+                <a16:creationId xmlns:a16="http://schemas.microsoft.com/office/drawing/2014/main" id="{B36A6D0C-9F40-A3BA-BCA7-B9EC46C0F924}"/>
+              </a:ext>
+            </a:extLst>
+          </p:cNvPr>
+          <p:cNvPicPr>
+            <a:picLocks noChangeAspect="1" noChangeArrowheads="1"/>
+          </p:cNvPicPr>
+          <p:nvPr/>
+        </p:nvPicPr>
+        <p:blipFill>
+          <a:blip r:embed="rId2">
+            <a:extLst>
+              <a:ext uri="{28A0092B-C50C-407E-A947-70E740481C1C}">
+                <a14:useLocalDpi xmlns:a14="http://schemas.microsoft.com/office/drawing/2010/main" val="0"/>
+              </a:ext>
+            </a:extLst>
+          </a:blip>
+          <a:srcRect/>
+          <a:stretch>
+            <a:fillRect/>
+          </a:stretch>
+        </p:blipFill>
+        <p:spPr bwMode="auto">
+          <a:xfrm>
+            <a:off x="5580112" y="4175916"/>
+            <a:ext cx="3556627" cy="2668875"/>
+          </a:xfrm>
+          <a:prstGeom prst="rect">
+            <a:avLst/>
+          </a:prstGeom>
+          <a:noFill/>
+          <a:extLst>
+            <a:ext uri="{909E8E84-426E-40DD-AFC4-6F175D3DCCD1}">
+              <a14:hiddenFill xmlns:a14="http://schemas.microsoft.com/office/drawing/2010/main">
+                <a:solidFill>
+                  <a:srgbClr val="FFFFFF"/>
+                </a:solidFill>
+              </a14:hiddenFill>
+            </a:ext>
+          </a:extLst>
+        </p:spPr>
+      </p:pic>
+    </p:spTree>
+    <p:extLst>
+      <p:ext uri="{BB962C8B-B14F-4D97-AF65-F5344CB8AC3E}">
+        <p14:creationId xmlns:p14="http://schemas.microsoft.com/office/powerpoint/2010/main" val="555187648"/>
+      </p:ext>
+    </p:extLst>
+  </p:cSld>
+  <p:clrMapOvr>
+    <a:masterClrMapping/>
+  </p:clrMapOvr>
+</p:sld>
+</file>
+
+<file path=ppt/slides/slide6.xml><?xml version="1.0" encoding="utf-8"?>
+<p:sld xmlns:a="http://schemas.openxmlformats.org/drawingml/2006/main" xmlns:r="http://schemas.openxmlformats.org/officeDocument/2006/relationships" xmlns:p="http://schemas.openxmlformats.org/presentationml/2006/main">
+  <p:cSld>
+    <p:spTree>
+      <p:nvGrpSpPr>
+        <p:cNvPr id="1" name=""/>
+        <p:cNvGrpSpPr/>
+        <p:nvPr/>
+      </p:nvGrpSpPr>
+      <p:grpSpPr>
+        <a:xfrm>
+          <a:off x="0" y="0"/>
+          <a:ext cx="0" cy="0"/>
+          <a:chOff x="0" y="0"/>
+          <a:chExt cx="0" cy="0"/>
+        </a:xfrm>
+      </p:grpSpPr>
+      <p:sp>
+        <p:nvSpPr>
+          <p:cNvPr id="2" name="Titre 1">
+            <a:extLst>
+              <a:ext uri="{FF2B5EF4-FFF2-40B4-BE49-F238E27FC236}">
+                <a16:creationId xmlns:a16="http://schemas.microsoft.com/office/drawing/2014/main" id="{242D33F0-7BDF-3E61-C049-EBFF2130908B}"/>
+              </a:ext>
+            </a:extLst>
+          </p:cNvPr>
+          <p:cNvSpPr>
+            <a:spLocks noGrp="1"/>
+          </p:cNvSpPr>
+          <p:nvPr>
+            <p:ph type="title"/>
+          </p:nvPr>
+        </p:nvSpPr>
+        <p:spPr/>
+        <p:txBody>
+          <a:bodyPr/>
+          <a:lstStyle/>
+          <a:p>
+            <a:r>
+              <a:rPr lang="fr-FR" dirty="0"/>
+              <a:t>SG90 et PWM</a:t>
+            </a:r>
+          </a:p>
+        </p:txBody>
+      </p:sp>
+      <p:sp>
+        <p:nvSpPr>
+          <p:cNvPr id="3" name="Espace réservé du contenu 2">
+            <a:extLst>
+              <a:ext uri="{FF2B5EF4-FFF2-40B4-BE49-F238E27FC236}">
+                <a16:creationId xmlns:a16="http://schemas.microsoft.com/office/drawing/2014/main" id="{BEBDFD2F-14F9-2D14-A01A-166800E4D0E4}"/>
+              </a:ext>
+            </a:extLst>
+          </p:cNvPr>
+          <p:cNvSpPr>
+            <a:spLocks noGrp="1"/>
+          </p:cNvSpPr>
+          <p:nvPr>
+            <p:ph idx="1"/>
+          </p:nvPr>
+        </p:nvSpPr>
+        <p:spPr/>
+        <p:txBody>
+          <a:bodyPr/>
+          <a:lstStyle/>
+          <a:p>
+            <a:r>
+              <a:rPr lang="fr-FR" dirty="0"/>
+              <a:t>Ce petit servomoteur est commandé en utilisant un signal PWM de 50 Hz de fréquence</a:t>
+            </a:r>
+          </a:p>
+          <a:p>
+            <a:pPr lvl="1"/>
+            <a:r>
+              <a:rPr lang="fr-FR" dirty="0"/>
+              <a:t>soit une impulsion toute les 20ms</a:t>
+            </a:r>
+          </a:p>
+          <a:p>
+            <a:r>
+              <a:rPr lang="fr-FR" dirty="0"/>
+              <a:t>La position du servomoteur est déterminée par la durée des impulsions, généralement variant entre 1ms et 2ms</a:t>
+            </a:r>
+          </a:p>
+        </p:txBody>
+      </p:sp>
+      <p:pic>
+        <p:nvPicPr>
+          <p:cNvPr id="7" name="Image 6">
+            <a:extLst>
+              <a:ext uri="{FF2B5EF4-FFF2-40B4-BE49-F238E27FC236}">
+                <a16:creationId xmlns:a16="http://schemas.microsoft.com/office/drawing/2014/main" id="{E8629ECB-C491-1566-9DAA-22018CED4473}"/>
+              </a:ext>
+            </a:extLst>
+          </p:cNvPr>
+          <p:cNvPicPr>
+            <a:picLocks noChangeAspect="1"/>
+          </p:cNvPicPr>
+          <p:nvPr/>
+        </p:nvPicPr>
+        <p:blipFill>
+          <a:blip r:embed="rId2"/>
+          <a:stretch>
+            <a:fillRect/>
+          </a:stretch>
+        </p:blipFill>
+        <p:spPr>
+          <a:xfrm>
+            <a:off x="2627784" y="3789039"/>
+            <a:ext cx="4392488" cy="3071051"/>
+          </a:xfrm>
+          <a:prstGeom prst="rect">
+            <a:avLst/>
+          </a:prstGeom>
+        </p:spPr>
+      </p:pic>
+    </p:spTree>
+    <p:extLst>
+      <p:ext uri="{BB962C8B-B14F-4D97-AF65-F5344CB8AC3E}">
+        <p14:creationId xmlns:p14="http://schemas.microsoft.com/office/powerpoint/2010/main" val="1948807161"/>
+      </p:ext>
+    </p:extLst>
+  </p:cSld>
+  <p:clrMapOvr>
+    <a:masterClrMapping/>
+  </p:clrMapOvr>
+</p:sld>
+</file>
+
+<file path=ppt/slides/slide7.xml><?xml version="1.0" encoding="utf-8"?>
+<p:sld xmlns:a="http://schemas.openxmlformats.org/drawingml/2006/main" xmlns:r="http://schemas.openxmlformats.org/officeDocument/2006/relationships" xmlns:p="http://schemas.openxmlformats.org/presentationml/2006/main">
+  <p:cSld>
+    <p:spTree>
+      <p:nvGrpSpPr>
+        <p:cNvPr id="1" name=""/>
+        <p:cNvGrpSpPr/>
+        <p:nvPr/>
+      </p:nvGrpSpPr>
+      <p:grpSpPr>
+        <a:xfrm>
+          <a:off x="0" y="0"/>
+          <a:ext cx="0" cy="0"/>
+          <a:chOff x="0" y="0"/>
+          <a:chExt cx="0" cy="0"/>
+        </a:xfrm>
+      </p:grpSpPr>
+      <p:sp>
+        <p:nvSpPr>
+          <p:cNvPr id="2" name="Titre 1">
+            <a:extLst>
+              <a:ext uri="{FF2B5EF4-FFF2-40B4-BE49-F238E27FC236}">
+                <a16:creationId xmlns:a16="http://schemas.microsoft.com/office/drawing/2014/main" id="{60BF10D6-D71B-324A-809F-D9DD6D863A4F}"/>
+              </a:ext>
+            </a:extLst>
+          </p:cNvPr>
+          <p:cNvSpPr>
+            <a:spLocks noGrp="1"/>
+          </p:cNvSpPr>
+          <p:nvPr>
+            <p:ph type="title"/>
+          </p:nvPr>
+        </p:nvSpPr>
+        <p:spPr/>
+        <p:txBody>
+          <a:bodyPr/>
+          <a:lstStyle/>
+          <a:p>
+            <a:r>
+              <a:rPr lang="fr-FR" dirty="0" err="1"/>
+              <a:t>Pinout</a:t>
+            </a:r>
+            <a:endParaRPr lang="fr-FR" dirty="0"/>
+          </a:p>
+        </p:txBody>
+      </p:sp>
+      <p:sp>
+        <p:nvSpPr>
+          <p:cNvPr id="3" name="Espace réservé du contenu 2">
+            <a:extLst>
+              <a:ext uri="{FF2B5EF4-FFF2-40B4-BE49-F238E27FC236}">
+                <a16:creationId xmlns:a16="http://schemas.microsoft.com/office/drawing/2014/main" id="{072161E9-ABFC-D8CC-7063-BF00398B3D9D}"/>
+              </a:ext>
+            </a:extLst>
+          </p:cNvPr>
+          <p:cNvSpPr>
+            <a:spLocks noGrp="1"/>
+          </p:cNvSpPr>
+          <p:nvPr>
+            <p:ph idx="1"/>
+          </p:nvPr>
+        </p:nvSpPr>
+        <p:spPr/>
+        <p:txBody>
+          <a:bodyPr/>
+          <a:lstStyle/>
+          <a:p>
+            <a:endParaRPr lang="fr-FR" dirty="0"/>
+          </a:p>
+        </p:txBody>
+      </p:sp>
+      <p:pic>
+        <p:nvPicPr>
+          <p:cNvPr id="5" name="Image 4">
+            <a:extLst>
+              <a:ext uri="{FF2B5EF4-FFF2-40B4-BE49-F238E27FC236}">
+                <a16:creationId xmlns:a16="http://schemas.microsoft.com/office/drawing/2014/main" id="{011A1D1C-1603-DD32-A800-188B1720BEA5}"/>
+              </a:ext>
+            </a:extLst>
+          </p:cNvPr>
+          <p:cNvPicPr>
+            <a:picLocks noChangeAspect="1"/>
+          </p:cNvPicPr>
+          <p:nvPr/>
+        </p:nvPicPr>
+        <p:blipFill>
+          <a:blip r:embed="rId2"/>
+          <a:stretch>
+            <a:fillRect/>
+          </a:stretch>
+        </p:blipFill>
+        <p:spPr>
+          <a:xfrm>
+            <a:off x="1533101" y="1412776"/>
+            <a:ext cx="6077798" cy="1638529"/>
+          </a:xfrm>
+          <a:prstGeom prst="rect">
+            <a:avLst/>
+          </a:prstGeom>
+        </p:spPr>
+      </p:pic>
+      <p:pic>
+        <p:nvPicPr>
+          <p:cNvPr id="7" name="Image 6">
+            <a:extLst>
+              <a:ext uri="{FF2B5EF4-FFF2-40B4-BE49-F238E27FC236}">
+                <a16:creationId xmlns:a16="http://schemas.microsoft.com/office/drawing/2014/main" id="{B74044F7-F7F6-20E6-7FC6-5F969CF8253E}"/>
+              </a:ext>
+            </a:extLst>
+          </p:cNvPr>
+          <p:cNvPicPr>
+            <a:picLocks noChangeAspect="1"/>
+          </p:cNvPicPr>
+          <p:nvPr/>
+        </p:nvPicPr>
+        <p:blipFill>
+          <a:blip r:embed="rId3"/>
+          <a:stretch>
+            <a:fillRect/>
+          </a:stretch>
+        </p:blipFill>
+        <p:spPr>
+          <a:xfrm>
+            <a:off x="2267744" y="3278528"/>
+            <a:ext cx="4824536" cy="3475016"/>
+          </a:xfrm>
+          <a:prstGeom prst="rect">
+            <a:avLst/>
+          </a:prstGeom>
+        </p:spPr>
+      </p:pic>
+    </p:spTree>
+    <p:extLst>
+      <p:ext uri="{BB962C8B-B14F-4D97-AF65-F5344CB8AC3E}">
+        <p14:creationId xmlns:p14="http://schemas.microsoft.com/office/powerpoint/2010/main" val="816028204"/>
+      </p:ext>
+    </p:extLst>
+  </p:cSld>
+  <p:clrMapOvr>
+    <a:masterClrMapping/>
+  </p:clrMapOvr>
+</p:sld>
+</file>
+
+<file path=ppt/slides/slide8.xml><?xml version="1.0" encoding="utf-8"?>
+<p:sld xmlns:a="http://schemas.openxmlformats.org/drawingml/2006/main" xmlns:r="http://schemas.openxmlformats.org/officeDocument/2006/relationships" xmlns:p="http://schemas.openxmlformats.org/presentationml/2006/main">
+  <p:cSld>
+    <p:spTree>
+      <p:nvGrpSpPr>
+        <p:cNvPr id="1" name=""/>
+        <p:cNvGrpSpPr/>
+        <p:nvPr/>
+      </p:nvGrpSpPr>
+      <p:grpSpPr>
+        <a:xfrm>
+          <a:off x="0" y="0"/>
+          <a:ext cx="0" cy="0"/>
+          <a:chOff x="0" y="0"/>
+          <a:chExt cx="0" cy="0"/>
+        </a:xfrm>
+      </p:grpSpPr>
+      <p:sp>
+        <p:nvSpPr>
+          <p:cNvPr id="2" name="Titre 1">
+            <a:extLst>
+              <a:ext uri="{FF2B5EF4-FFF2-40B4-BE49-F238E27FC236}">
+                <a16:creationId xmlns:a16="http://schemas.microsoft.com/office/drawing/2014/main" id="{0B482C53-E79C-DA26-9EDE-BE893F25437F}"/>
+              </a:ext>
+            </a:extLst>
+          </p:cNvPr>
+          <p:cNvSpPr>
+            <a:spLocks noGrp="1"/>
+          </p:cNvSpPr>
+          <p:nvPr>
+            <p:ph type="title"/>
+          </p:nvPr>
+        </p:nvSpPr>
+        <p:spPr/>
+        <p:txBody>
+          <a:bodyPr/>
+          <a:lstStyle/>
+          <a:p>
+            <a:r>
+              <a:rPr lang="fr-FR" dirty="0"/>
+              <a:t>Développement directement en PWM</a:t>
+            </a:r>
+          </a:p>
+        </p:txBody>
+      </p:sp>
+      <p:sp>
+        <p:nvSpPr>
+          <p:cNvPr id="3" name="Espace réservé du contenu 2">
+            <a:extLst>
+              <a:ext uri="{FF2B5EF4-FFF2-40B4-BE49-F238E27FC236}">
+                <a16:creationId xmlns:a16="http://schemas.microsoft.com/office/drawing/2014/main" id="{EC4BBB16-09D3-EDF9-0A29-EA08D0BA272B}"/>
+              </a:ext>
+            </a:extLst>
+          </p:cNvPr>
+          <p:cNvSpPr>
+            <a:spLocks noGrp="1"/>
+          </p:cNvSpPr>
+          <p:nvPr>
+            <p:ph idx="1"/>
+          </p:nvPr>
+        </p:nvSpPr>
+        <p:spPr/>
+        <p:txBody>
+          <a:bodyPr/>
+          <a:lstStyle/>
+          <a:p>
+            <a:r>
+              <a:rPr lang="fr-FR" sz="2000" dirty="0"/>
+              <a:t>Nécessite pas mal de calcul</a:t>
+            </a:r>
+          </a:p>
+          <a:p>
+            <a:pPr marL="400050" lvl="1" indent="0">
+              <a:buNone/>
+            </a:pPr>
+            <a:r>
+              <a:rPr lang="fr-FR" sz="2000" dirty="0" err="1"/>
+              <a:t>from</a:t>
+            </a:r>
+            <a:r>
+              <a:rPr lang="fr-FR" sz="2000" dirty="0"/>
+              <a:t> machine import </a:t>
+            </a:r>
+            <a:r>
+              <a:rPr lang="fr-FR" sz="2000" dirty="0" err="1"/>
+              <a:t>Pin,PWM</a:t>
+            </a:r>
+            <a:endParaRPr lang="fr-FR" sz="2000" dirty="0"/>
+          </a:p>
+          <a:p>
+            <a:pPr marL="400050" lvl="1" indent="0">
+              <a:buNone/>
+            </a:pPr>
+            <a:r>
+              <a:rPr lang="fr-FR" sz="2000" dirty="0"/>
+              <a:t>import time</a:t>
+            </a:r>
+          </a:p>
+          <a:p>
+            <a:pPr marL="400050" lvl="1" indent="0">
+              <a:buNone/>
+            </a:pPr>
+            <a:r>
+              <a:rPr lang="fr-FR" sz="2000" dirty="0"/>
+              <a:t>sg90 = PWM(Pin(22, mode=</a:t>
+            </a:r>
+            <a:r>
+              <a:rPr lang="fr-FR" sz="2000" dirty="0" err="1"/>
+              <a:t>Pin.OUT</a:t>
+            </a:r>
+            <a:r>
+              <a:rPr lang="fr-FR" sz="2000" dirty="0"/>
+              <a:t>))</a:t>
+            </a:r>
+          </a:p>
+          <a:p>
+            <a:pPr marL="400050" lvl="1" indent="0">
+              <a:buNone/>
+            </a:pPr>
+            <a:r>
+              <a:rPr lang="fr-FR" sz="2000" dirty="0"/>
+              <a:t>sg90.freq(50)</a:t>
+            </a:r>
+          </a:p>
+          <a:p>
+            <a:pPr marL="400050" lvl="1" indent="0">
+              <a:buNone/>
+            </a:pPr>
+            <a:r>
+              <a:rPr lang="fr-FR" sz="2000" dirty="0"/>
+              <a:t># 0.5ms/20ms = 0.025 = 2.5% </a:t>
+            </a:r>
+            <a:r>
+              <a:rPr lang="fr-FR" sz="2000" dirty="0" err="1"/>
+              <a:t>duty</a:t>
+            </a:r>
+            <a:r>
+              <a:rPr lang="fr-FR" sz="2000" dirty="0"/>
+              <a:t> cycle</a:t>
+            </a:r>
+          </a:p>
+          <a:p>
+            <a:pPr marL="400050" lvl="1" indent="0">
+              <a:buNone/>
+            </a:pPr>
+            <a:r>
+              <a:rPr lang="fr-FR" sz="2000" dirty="0"/>
+              <a:t># 2.4ms/20ms = 0.12 = 12% </a:t>
+            </a:r>
+            <a:r>
+              <a:rPr lang="fr-FR" sz="2000" dirty="0" err="1"/>
+              <a:t>duty</a:t>
+            </a:r>
+            <a:r>
+              <a:rPr lang="fr-FR" sz="2000" dirty="0"/>
+              <a:t> cycle</a:t>
+            </a:r>
+          </a:p>
+          <a:p>
+            <a:pPr marL="400050" lvl="1" indent="0">
+              <a:buNone/>
+            </a:pPr>
+            <a:r>
+              <a:rPr lang="fr-FR" sz="2000" dirty="0"/>
+              <a:t># 0.025*1024=25.6</a:t>
+            </a:r>
+          </a:p>
+          <a:p>
+            <a:pPr marL="400050" lvl="1" indent="0">
+              <a:buNone/>
+            </a:pPr>
+            <a:r>
+              <a:rPr lang="fr-FR" sz="2000" dirty="0"/>
+              <a:t># 0.12*1024=122.88</a:t>
+            </a:r>
+          </a:p>
+          <a:p>
+            <a:pPr marL="400050" lvl="1" indent="0">
+              <a:buNone/>
+            </a:pPr>
+            <a:r>
+              <a:rPr lang="fr-FR" sz="2000" dirty="0" err="1"/>
+              <a:t>while</a:t>
+            </a:r>
+            <a:r>
+              <a:rPr lang="fr-FR" sz="2000" dirty="0"/>
+              <a:t> </a:t>
+            </a:r>
+            <a:r>
+              <a:rPr lang="fr-FR" sz="2000" dirty="0" err="1"/>
+              <a:t>True</a:t>
+            </a:r>
+            <a:r>
+              <a:rPr lang="fr-FR" sz="2000" dirty="0"/>
+              <a:t>:</a:t>
+            </a:r>
+          </a:p>
+          <a:p>
+            <a:pPr marL="400050" lvl="1" indent="0">
+              <a:buNone/>
+            </a:pPr>
+            <a:r>
+              <a:rPr lang="fr-FR" sz="2000" dirty="0"/>
+              <a:t>    sg90.duty(26)</a:t>
+            </a:r>
+          </a:p>
+          <a:p>
+            <a:pPr marL="400050" lvl="1" indent="0">
+              <a:buNone/>
+            </a:pPr>
+            <a:r>
+              <a:rPr lang="fr-FR" sz="2000" dirty="0"/>
+              <a:t>    </a:t>
+            </a:r>
+            <a:r>
+              <a:rPr lang="fr-FR" sz="2000" dirty="0" err="1"/>
+              <a:t>time.sleep</a:t>
+            </a:r>
+            <a:r>
+              <a:rPr lang="fr-FR" sz="2000" dirty="0"/>
+              <a:t>(1)</a:t>
+            </a:r>
+          </a:p>
+          <a:p>
+            <a:pPr marL="400050" lvl="1" indent="0">
+              <a:buNone/>
+            </a:pPr>
+            <a:r>
+              <a:rPr lang="fr-FR" sz="2000" dirty="0"/>
+              <a:t>    sg90.duty(123)</a:t>
+            </a:r>
+          </a:p>
+          <a:p>
+            <a:pPr marL="400050" lvl="1" indent="0">
+              <a:buNone/>
+            </a:pPr>
+            <a:r>
+              <a:rPr lang="fr-FR" sz="2000" dirty="0"/>
+              <a:t>    </a:t>
+            </a:r>
+            <a:r>
+              <a:rPr lang="fr-FR" sz="2000" dirty="0" err="1"/>
+              <a:t>time.sleep</a:t>
+            </a:r>
+            <a:r>
+              <a:rPr lang="fr-FR" sz="2000" dirty="0"/>
+              <a:t>(1)</a:t>
+            </a:r>
+          </a:p>
+        </p:txBody>
+      </p:sp>
+      <p:pic>
+        <p:nvPicPr>
+          <p:cNvPr id="9" name="Image 8">
+            <a:extLst>
+              <a:ext uri="{FF2B5EF4-FFF2-40B4-BE49-F238E27FC236}">
+                <a16:creationId xmlns:a16="http://schemas.microsoft.com/office/drawing/2014/main" id="{AB37C272-8BE6-2C8D-CB6D-8183C49E948B}"/>
+              </a:ext>
+            </a:extLst>
+          </p:cNvPr>
+          <p:cNvPicPr>
+            <a:picLocks noChangeAspect="1"/>
+          </p:cNvPicPr>
+          <p:nvPr/>
+        </p:nvPicPr>
+        <p:blipFill>
+          <a:blip r:embed="rId2"/>
+          <a:stretch>
+            <a:fillRect/>
+          </a:stretch>
+        </p:blipFill>
+        <p:spPr>
+          <a:xfrm>
+            <a:off x="6012160" y="3933056"/>
+            <a:ext cx="2863504" cy="2157173"/>
+          </a:xfrm>
+          <a:prstGeom prst="rect">
+            <a:avLst/>
+          </a:prstGeom>
+        </p:spPr>
+      </p:pic>
+    </p:spTree>
+    <p:extLst>
+      <p:ext uri="{BB962C8B-B14F-4D97-AF65-F5344CB8AC3E}">
+        <p14:creationId xmlns:p14="http://schemas.microsoft.com/office/powerpoint/2010/main" val="1333093089"/>
+      </p:ext>
+    </p:extLst>
+  </p:cSld>
+  <p:clrMapOvr>
+    <a:masterClrMapping/>
+  </p:clrMapOvr>
+</p:sld>
+</file>
+
+<file path=ppt/slides/slide9.xml><?xml version="1.0" encoding="utf-8"?>
+<p:sld xmlns:a="http://schemas.openxmlformats.org/drawingml/2006/main" xmlns:r="http://schemas.openxmlformats.org/officeDocument/2006/relationships" xmlns:p="http://schemas.openxmlformats.org/presentationml/2006/main">
+  <p:cSld>
+    <p:spTree>
+      <p:nvGrpSpPr>
+        <p:cNvPr id="1" name=""/>
+        <p:cNvGrpSpPr/>
+        <p:nvPr/>
+      </p:nvGrpSpPr>
+      <p:grpSpPr>
+        <a:xfrm>
+          <a:off x="0" y="0"/>
+          <a:ext cx="0" cy="0"/>
+          <a:chOff x="0" y="0"/>
+          <a:chExt cx="0" cy="0"/>
+        </a:xfrm>
+      </p:grpSpPr>
+      <p:sp>
+        <p:nvSpPr>
+          <p:cNvPr id="2" name="Titre 1">
+            <a:extLst>
+              <a:ext uri="{FF2B5EF4-FFF2-40B4-BE49-F238E27FC236}">
+                <a16:creationId xmlns:a16="http://schemas.microsoft.com/office/drawing/2014/main" id="{27DF4CF1-DE33-C322-7F1B-C7808FAE75C7}"/>
+              </a:ext>
+            </a:extLst>
+          </p:cNvPr>
+          <p:cNvSpPr>
+            <a:spLocks noGrp="1"/>
+          </p:cNvSpPr>
+          <p:nvPr>
+            <p:ph type="title"/>
+          </p:nvPr>
+        </p:nvSpPr>
+        <p:spPr/>
+        <p:txBody>
+          <a:bodyPr/>
+          <a:lstStyle/>
+          <a:p>
+            <a:r>
+              <a:rPr lang="fr-FR" dirty="0"/>
+              <a:t>Servo.py</a:t>
+            </a:r>
+          </a:p>
+        </p:txBody>
+      </p:sp>
+      <p:sp>
+        <p:nvSpPr>
+          <p:cNvPr id="3" name="Espace réservé du contenu 2">
+            <a:extLst>
+              <a:ext uri="{FF2B5EF4-FFF2-40B4-BE49-F238E27FC236}">
+                <a16:creationId xmlns:a16="http://schemas.microsoft.com/office/drawing/2014/main" id="{68AEBF5A-BDA4-667A-284E-12C9EF772D6A}"/>
+              </a:ext>
+            </a:extLst>
+          </p:cNvPr>
+          <p:cNvSpPr>
+            <a:spLocks noGrp="1"/>
+          </p:cNvSpPr>
+          <p:nvPr>
+            <p:ph idx="1"/>
+          </p:nvPr>
+        </p:nvSpPr>
+        <p:spPr/>
+        <p:txBody>
+          <a:bodyPr/>
+          <a:lstStyle/>
+          <a:p>
+            <a:r>
+              <a:rPr lang="fr-FR" sz="1800" dirty="0"/>
+              <a:t>La librairie Servo.py permet de simplifier le code</a:t>
+            </a:r>
+          </a:p>
+          <a:p>
+            <a:pPr marL="457200" lvl="1" indent="0">
+              <a:buNone/>
+            </a:pPr>
+            <a:r>
+              <a:rPr lang="fr-FR" sz="2000" dirty="0" err="1"/>
+              <a:t>from</a:t>
+            </a:r>
+            <a:r>
+              <a:rPr lang="fr-FR" sz="2000" dirty="0"/>
+              <a:t> servo import Servo</a:t>
+            </a:r>
+          </a:p>
+          <a:p>
+            <a:pPr marL="457200" lvl="1" indent="0">
+              <a:buNone/>
+            </a:pPr>
+            <a:r>
+              <a:rPr lang="fr-FR" sz="2000" dirty="0"/>
+              <a:t>import time</a:t>
+            </a:r>
+          </a:p>
+          <a:p>
+            <a:pPr marL="457200" lvl="1" indent="0">
+              <a:buNone/>
+            </a:pPr>
+            <a:r>
+              <a:rPr lang="fr-FR" sz="2000" dirty="0" err="1"/>
+              <a:t>motor</a:t>
+            </a:r>
+            <a:r>
+              <a:rPr lang="fr-FR" sz="2000" dirty="0"/>
+              <a:t>=Servo(pin=22) # A changer selon la broche utilisée</a:t>
+            </a:r>
+          </a:p>
+          <a:p>
+            <a:pPr marL="457200" lvl="1" indent="0">
+              <a:buNone/>
+            </a:pPr>
+            <a:r>
+              <a:rPr lang="fr-FR" sz="2000" dirty="0" err="1"/>
+              <a:t>motor.move</a:t>
+            </a:r>
+            <a:r>
+              <a:rPr lang="fr-FR" sz="2000" dirty="0"/>
+              <a:t>(0) # tourne le servo à 0°</a:t>
+            </a:r>
+          </a:p>
+          <a:p>
+            <a:pPr marL="457200" lvl="1" indent="0">
+              <a:buNone/>
+            </a:pPr>
+            <a:r>
+              <a:rPr lang="fr-FR" sz="2000" dirty="0" err="1"/>
+              <a:t>time.sleep</a:t>
+            </a:r>
+            <a:r>
+              <a:rPr lang="fr-FR" sz="2000" dirty="0"/>
+              <a:t>(0.3)</a:t>
+            </a:r>
+          </a:p>
+          <a:p>
+            <a:pPr marL="457200" lvl="1" indent="0">
+              <a:buNone/>
+            </a:pPr>
+            <a:r>
+              <a:rPr lang="fr-FR" sz="2000" dirty="0" err="1"/>
+              <a:t>motor.move</a:t>
+            </a:r>
+            <a:r>
+              <a:rPr lang="fr-FR" sz="2000" dirty="0"/>
+              <a:t>(90) # tourne le servo à 90°</a:t>
+            </a:r>
+          </a:p>
+          <a:p>
+            <a:pPr marL="457200" lvl="1" indent="0">
+              <a:buNone/>
+            </a:pPr>
+            <a:r>
+              <a:rPr lang="fr-FR" sz="2000" dirty="0" err="1"/>
+              <a:t>time.sleep</a:t>
+            </a:r>
+            <a:r>
+              <a:rPr lang="fr-FR" sz="2000" dirty="0"/>
+              <a:t>(0.3)</a:t>
+            </a:r>
+          </a:p>
+          <a:p>
+            <a:pPr marL="457200" lvl="1" indent="0">
+              <a:buNone/>
+            </a:pPr>
+            <a:r>
+              <a:rPr lang="fr-FR" sz="2000" dirty="0" err="1"/>
+              <a:t>motor.move</a:t>
+            </a:r>
+            <a:r>
+              <a:rPr lang="fr-FR" sz="2000" dirty="0"/>
+              <a:t>(180) # tourne le servo à 180°</a:t>
+            </a:r>
+          </a:p>
+          <a:p>
+            <a:pPr marL="457200" lvl="1" indent="0">
+              <a:buNone/>
+            </a:pPr>
+            <a:r>
+              <a:rPr lang="fr-FR" sz="2000" dirty="0" err="1"/>
+              <a:t>time.sleep</a:t>
+            </a:r>
+            <a:r>
+              <a:rPr lang="fr-FR" sz="2000" dirty="0"/>
+              <a:t>(0.3)</a:t>
+            </a:r>
+          </a:p>
+          <a:p>
+            <a:pPr marL="457200" lvl="1" indent="0">
+              <a:buNone/>
+            </a:pPr>
+            <a:r>
+              <a:rPr lang="fr-FR" sz="2000" dirty="0" err="1"/>
+              <a:t>motor.move</a:t>
+            </a:r>
+            <a:r>
+              <a:rPr lang="fr-FR" sz="2000" dirty="0"/>
+              <a:t>(90) # tourne le servo à 90°</a:t>
+            </a:r>
+          </a:p>
+          <a:p>
+            <a:pPr marL="457200" lvl="1" indent="0">
+              <a:buNone/>
+            </a:pPr>
+            <a:r>
+              <a:rPr lang="fr-FR" sz="2000" dirty="0" err="1"/>
+              <a:t>time.sleep</a:t>
+            </a:r>
+            <a:r>
+              <a:rPr lang="fr-FR" sz="2000" dirty="0"/>
+              <a:t>(0.3)</a:t>
+            </a:r>
+          </a:p>
+          <a:p>
+            <a:pPr marL="457200" lvl="1" indent="0">
+              <a:buNone/>
+            </a:pPr>
+            <a:r>
+              <a:rPr lang="fr-FR" sz="2000" dirty="0" err="1"/>
+              <a:t>motor.move</a:t>
+            </a:r>
+            <a:r>
+              <a:rPr lang="fr-FR" sz="2000" dirty="0"/>
+              <a:t>(0) # tourne le servo à 0°</a:t>
+            </a:r>
+          </a:p>
+          <a:p>
+            <a:pPr marL="457200" lvl="1" indent="0">
+              <a:buNone/>
+            </a:pPr>
+            <a:r>
+              <a:rPr lang="fr-FR" sz="2000" dirty="0" err="1"/>
+              <a:t>time.sleep</a:t>
+            </a:r>
+            <a:r>
+              <a:rPr lang="fr-FR" sz="2000" dirty="0"/>
+              <a:t>(0.3)</a:t>
+            </a:r>
+          </a:p>
+        </p:txBody>
+      </p:sp>
+      <p:pic>
+        <p:nvPicPr>
+          <p:cNvPr id="3074" name="Picture 2" descr="Contrôle du servo SG90 avec ESP32">
+            <a:extLst>
+              <a:ext uri="{FF2B5EF4-FFF2-40B4-BE49-F238E27FC236}">
+                <a16:creationId xmlns:a16="http://schemas.microsoft.com/office/drawing/2014/main" id="{CDBC7EA0-608E-9083-5153-D1BDFEF4562F}"/>
+              </a:ext>
+            </a:extLst>
+          </p:cNvPr>
+          <p:cNvPicPr>
+            <a:picLocks noChangeAspect="1" noChangeArrowheads="1"/>
+          </p:cNvPicPr>
+          <p:nvPr/>
+        </p:nvPicPr>
+        <p:blipFill>
+          <a:blip r:embed="rId2">
+            <a:extLst>
+              <a:ext uri="{28A0092B-C50C-407E-A947-70E740481C1C}">
+                <a14:useLocalDpi xmlns:a14="http://schemas.microsoft.com/office/drawing/2010/main" val="0"/>
+              </a:ext>
+            </a:extLst>
+          </a:blip>
+          <a:srcRect/>
+          <a:stretch>
+            <a:fillRect/>
+          </a:stretch>
+        </p:blipFill>
+        <p:spPr bwMode="auto">
+          <a:xfrm>
+            <a:off x="5953125" y="3807633"/>
+            <a:ext cx="3190875" cy="3048000"/>
+          </a:xfrm>
+          <a:prstGeom prst="rect">
+            <a:avLst/>
+          </a:prstGeom>
+          <a:noFill/>
+          <a:extLst>
+            <a:ext uri="{909E8E84-426E-40DD-AFC4-6F175D3DCCD1}">
+              <a14:hiddenFill xmlns:a14="http://schemas.microsoft.com/office/drawing/2010/main">
+                <a:solidFill>
+                  <a:srgbClr val="FFFFFF"/>
+                </a:solidFill>
+              </a14:hiddenFill>
+            </a:ext>
+          </a:extLst>
+        </p:spPr>
+      </p:pic>
+    </p:spTree>
+    <p:extLst>
+      <p:ext uri="{BB962C8B-B14F-4D97-AF65-F5344CB8AC3E}">
+        <p14:creationId xmlns:p14="http://schemas.microsoft.com/office/powerpoint/2010/main" val="1293999495"/>
       </p:ext>
     </p:extLst>
   </p:cSld>
